--- a/tutor-time/question-the-headline/downloads/Question_the_Headline_Lesson_2.pptx
+++ b/tutor-time/question-the-headline/downloads/Question_the_Headline_Lesson_2.pptx
@@ -4670,7 +4670,7 @@
                 </a:solidFill>
                 <a:latin typeface="Karla"/>
               </a:rPr>
-              <a:t>Both countries had the drug. In the United States it was only ever given out in trials, because one official at the medicines regulator, Frances Kelsey, refused to approve it.</a:t>
+              <a:t>Both countries had the drug. In the UK it was on sale from 1958 to 1961. In the US it was only handed out in trials, to doctors testing it.</a:t>
             </a:r>
           </a:p>
         </p:txBody>
@@ -7175,7 +7175,7 @@
                 </a:solidFill>
                 <a:latin typeface="Georgia"/>
               </a:rPr>
-              <a:t>In September 1960, Frances Kelsey at the US medicines regulator was asked to approve thalidomide. She thought the reports were too positive and too thin. “It was just too positive; this couldn’t be the perfect drug with no risk,” she said. She asked for proof it was safe for an unborn baby, again and again, and never approved it.</a:t>
+              <a:t>In September 1960, Frances Kelsey at the US medicines regulator was asked to approve thalidomide. She thought the evidence was thin. “It was just too positive; this couldn’t be the perfect drug with no risk,” she said. She asked for proof it was safe for an unborn baby, again and again, and never approved it.</a:t>
             </a:r>
           </a:p>
         </p:txBody>
@@ -17185,7 +17185,7 @@
                 </a:solidFill>
                 <a:latin typeface="Karla"/>
               </a:rPr>
-              <a:t>Tested on who, for how long, and by somebody with nothing to gain?</a:t>
+              <a:t>Tested on whom, for how long, and by somebody with nothing to gain?</a:t>
             </a:r>
           </a:p>
         </p:txBody>
@@ -20109,7 +20109,7 @@
                 </a:solidFill>
                 <a:latin typeface="Georgia"/>
               </a:rPr>
-              <a:t>At the time, new medicines were tested for poisoning on rodents, and that was normal. Nobody had to test what a medicine did to a baby before birth, and thalidomide was never tested in pregnancy before it went on sale.</a:t>
+              <a:t>At the time, new medicines were tested on rats and mice to check they were not poisonous. Nobody had to test what a medicine did to a baby before birth, and thalidomide was never tested in pregnancy before it went on sale.</a:t>
             </a:r>
           </a:p>
         </p:txBody>

--- a/tutor-time/question-the-headline/downloads/Question_the_Headline_Lesson_2.pptx
+++ b/tutor-time/question-the-headline/downloads/Question_the_Headline_Lesson_2.pptx
@@ -166,7 +166,7 @@
                         <a:solidFill>
                           <a:srgbClr val="262422"/>
                         </a:solidFill>
-                        <a:latin typeface="Karla"/>
+                        <a:latin typeface="Calibri"/>
                       </a:rPr>
                       <a:t>about 2,000</a:t>
                     </a:r>
@@ -193,7 +193,7 @@
                         <a:solidFill>
                           <a:srgbClr val="262422"/>
                         </a:solidFill>
-                        <a:latin typeface="Karla"/>
+                        <a:latin typeface="Calibri"/>
                       </a:rPr>
                       <a:t>17</a:t>
                     </a:r>
@@ -256,7 +256,7 @@
                   <a:solidFill>
                     <a:srgbClr val="262422"/>
                   </a:solidFill>
-                  <a:latin typeface="Karla"/>
+                  <a:latin typeface="Calibri"/>
                 </a:defRPr>
               </a:pPr>
             </a:p>
@@ -300,7 +300,7 @@
                 <a:solidFill>
                   <a:srgbClr val="262422"/>
                 </a:solidFill>
-                <a:latin typeface="Karla"/>
+                <a:latin typeface="Calibri"/>
               </a:defRPr>
             </a:pPr>
           </a:p>
@@ -338,7 +338,7 @@
           <a:solidFill>
             <a:srgbClr val="262422"/>
           </a:solidFill>
-          <a:latin typeface="Karla"/>
+          <a:latin typeface="Calibri"/>
         </a:defRPr>
       </a:pPr>
       <a:endParaRPr lang="en-US"/>
@@ -3411,7 +3411,7 @@
                 <a:solidFill>
                   <a:srgbClr val="34322F"/>
                 </a:solidFill>
-                <a:latin typeface="Karla"/>
+                <a:latin typeface="Calibri"/>
               </a:rPr>
               <a:t>TUTOR TIME  ·  QUESTION THE HEADLINE  ·  LESSON 2 OF 5</a:t>
             </a:r>
@@ -3494,11 +3494,11 @@
               </a:spcAft>
             </a:pPr>
             <a:r>
-              <a:rPr sz="3000" b="1" i="0">
+              <a:rPr sz="3000" b="0" i="0">
                 <a:solidFill>
                   <a:srgbClr val="262422"/>
                 </a:solidFill>
-                <a:latin typeface="Libre Caslon Display"/>
+                <a:latin typeface="Georgia"/>
               </a:rPr>
               <a:t>The Daily Claim</a:t>
             </a:r>
@@ -3585,7 +3585,7 @@
                 <a:solidFill>
                   <a:srgbClr val="56524B"/>
                 </a:solidFill>
-                <a:latin typeface="Karla"/>
+                <a:latin typeface="Calibri"/>
               </a:rPr>
               <a:t>LONDON, 1958</a:t>
             </a:r>
@@ -3628,7 +3628,7 @@
                 <a:solidFill>
                   <a:srgbClr val="56524B"/>
                 </a:solidFill>
-                <a:latin typeface="Karla"/>
+                <a:latin typeface="Calibri"/>
               </a:rPr>
               <a:t>VOLUME ONE</a:t>
             </a:r>
@@ -3671,7 +3671,7 @@
                 <a:solidFill>
                   <a:srgbClr val="56524B"/>
                 </a:solidFill>
-                <a:latin typeface="Karla"/>
+                <a:latin typeface="Calibri"/>
               </a:rPr>
               <a:t>TUTOR TIME</a:t>
             </a:r>
@@ -3754,11 +3754,11 @@
               </a:spcAft>
             </a:pPr>
             <a:r>
-              <a:rPr sz="4200" b="1" i="0">
+              <a:rPr sz="4200" b="0" i="0">
                 <a:solidFill>
                   <a:srgbClr val="262422"/>
                 </a:solidFill>
-                <a:latin typeface="Libre Caslon Display"/>
+                <a:latin typeface="Georgia"/>
               </a:rPr>
               <a:t>Complete Safety</a:t>
             </a:r>
@@ -3845,7 +3845,7 @@
                 <a:solidFill>
                   <a:srgbClr val="56524B"/>
                 </a:solidFill>
-                <a:latin typeface="Karla"/>
+                <a:latin typeface="Calibri"/>
               </a:rPr>
               <a:t>A claim that was printed as true, and four pieces of evidence to test it.</a:t>
             </a:r>
@@ -3900,7 +3900,7 @@
                 <a:solidFill>
                   <a:srgbClr val="FFFDF7"/>
                 </a:solidFill>
-                <a:latin typeface="Karla"/>
+                <a:latin typeface="Calibri"/>
               </a:rPr>
               <a:t>VOLUME ONE</a:t>
             </a:r>
@@ -3968,7 +3968,7 @@
                 <a:solidFill>
                   <a:srgbClr val="8C877D"/>
                 </a:solidFill>
-                <a:latin typeface="Karla"/>
+                <a:latin typeface="Calibri"/>
               </a:rPr>
               <a:t>The Pastoral Guide</a:t>
             </a:r>
@@ -4011,7 +4011,7 @@
                 <a:solidFill>
                   <a:srgbClr val="8C877D"/>
                 </a:solidFill>
-                <a:latin typeface="Karla"/>
+                <a:latin typeface="Calibri"/>
               </a:rPr>
               <a:t>1 / 19</a:t>
             </a:r>
@@ -4116,7 +4116,7 @@
                 <a:solidFill>
                   <a:srgbClr val="34322F"/>
                 </a:solidFill>
-                <a:latin typeface="Karla"/>
+                <a:latin typeface="Calibri"/>
               </a:rPr>
               <a:t>QUESTION THE HEADLINE  ·  LESSON 2 OF 5</a:t>
             </a:r>
@@ -4171,7 +4171,7 @@
                 <a:solidFill>
                   <a:srgbClr val="FFFDF7"/>
                 </a:solidFill>
-                <a:latin typeface="Karla"/>
+                <a:latin typeface="Calibri"/>
               </a:rPr>
               <a:t>ROUND 3 OF 4</a:t>
             </a:r>
@@ -4258,7 +4258,7 @@
                 <a:solidFill>
                   <a:srgbClr val="FFFDF7"/>
                 </a:solidFill>
-                <a:latin typeface="Karla"/>
+                <a:latin typeface="Calibri"/>
               </a:rPr>
               <a:t>EVIDENCE C</a:t>
             </a:r>
@@ -4385,11 +4385,11 @@
               </a:spcAft>
             </a:pPr>
             <a:r>
-              <a:rPr sz="1800" b="1" i="0">
+              <a:rPr sz="1800" b="0" i="0">
                 <a:solidFill>
                   <a:srgbClr val="262422"/>
                 </a:solidFill>
-                <a:latin typeface="Libre Caslon Display"/>
+                <a:latin typeface="Georgia"/>
               </a:rPr>
               <a:t>The numbers</a:t>
             </a:r>
@@ -4538,7 +4538,7 @@
                 <a:solidFill>
                   <a:srgbClr val="56524B"/>
                 </a:solidFill>
-                <a:latin typeface="Karla"/>
+                <a:latin typeface="Calibri"/>
               </a:rPr>
               <a:t>Babies</a:t>
             </a:r>
@@ -4625,7 +4625,7 @@
                 <a:solidFill>
                   <a:srgbClr val="34322F"/>
                 </a:solidFill>
-                <a:latin typeface="Karla"/>
+                <a:latin typeface="Calibri"/>
               </a:rPr>
               <a:t>ABOUT THIS</a:t>
             </a:r>
@@ -4668,7 +4668,7 @@
                 <a:solidFill>
                   <a:srgbClr val="262422"/>
                 </a:solidFill>
-                <a:latin typeface="Karla"/>
+                <a:latin typeface="Calibri"/>
               </a:rPr>
               <a:t>Both countries had the drug. In the UK it was on sale from 1958 to 1961. In the US it was only handed out in trials, to doctors testing it.</a:t>
             </a:r>
@@ -4711,7 +4711,7 @@
                 <a:solidFill>
                   <a:srgbClr val="8C877D"/>
                 </a:solidFill>
-                <a:latin typeface="Karla"/>
+                <a:latin typeface="Calibri"/>
               </a:rPr>
               <a:t>Source: Wikipedia, Thalidomide scandal; UChicago Medicine</a:t>
             </a:r>
@@ -4754,7 +4754,7 @@
                 <a:solidFill>
                   <a:srgbClr val="34322F"/>
                 </a:solidFill>
-                <a:latin typeface="Karla"/>
+                <a:latin typeface="Calibri"/>
               </a:rPr>
               <a:t>Read it as a group. Fill in the card C row on your evidence sheet, then move on the line.</a:t>
             </a:r>
@@ -4822,7 +4822,7 @@
                 <a:solidFill>
                   <a:srgbClr val="8C877D"/>
                 </a:solidFill>
-                <a:latin typeface="Karla"/>
+                <a:latin typeface="Calibri"/>
               </a:rPr>
               <a:t>The Pastoral Guide</a:t>
             </a:r>
@@ -4865,7 +4865,7 @@
                 <a:solidFill>
                   <a:srgbClr val="8C877D"/>
                 </a:solidFill>
-                <a:latin typeface="Karla"/>
+                <a:latin typeface="Calibri"/>
               </a:rPr>
               <a:t>10 / 19</a:t>
             </a:r>
@@ -4970,7 +4970,7 @@
                 <a:solidFill>
                   <a:srgbClr val="34322F"/>
                 </a:solidFill>
-                <a:latin typeface="Karla"/>
+                <a:latin typeface="Calibri"/>
               </a:rPr>
               <a:t>QUESTION THE HEADLINE  ·  LESSON 2 OF 5</a:t>
             </a:r>
@@ -4979,19 +4979,147 @@
       </p:sp>
       <p:sp>
         <p:nvSpPr>
-          <p:cNvPr id="4" name="Rounded Rectangle 3"/>
+          <p:cNvPr id="5" name="TextBox 4"/>
+          <p:cNvSpPr txBox="1"/>
+          <p:nvPr/>
+        </p:nvSpPr>
+        <p:spPr>
+          <a:xfrm>
+            <a:off x="685800" y="566928"/>
+            <a:ext cx="7772400" cy="434848"/>
+          </a:xfrm>
+          <a:prstGeom prst="rect">
+            <a:avLst/>
+          </a:prstGeom>
+          <a:noFill/>
+          <a:effectLst/>
+        </p:spPr>
+        <p:txBody>
+          <a:bodyPr wrap="square" anchor="t" lIns="0" rIns="0" tIns="0" bIns="0">
+            <a:spAutoFit/>
+          </a:bodyPr>
+          <a:lstStyle/>
+          <a:p>
+            <a:pPr algn="l">
+              <a:lnSpc>
+                <a:spcPct val="105000"/>
+              </a:lnSpc>
+              <a:spcAft>
+                <a:spcPts val="0"/>
+              </a:spcAft>
+            </a:pPr>
+            <a:r>
+              <a:rPr sz="2800" b="0" i="0">
+                <a:solidFill>
+                  <a:srgbClr val="262422"/>
+                </a:solidFill>
+                <a:latin typeface="Georgia"/>
+              </a:rPr>
+              <a:t>What do the numbers say?</a:t>
+            </a:r>
+          </a:p>
+        </p:txBody>
+      </p:sp>
+      <p:sp>
+        <p:nvSpPr>
+          <p:cNvPr id="6" name="TextBox 5"/>
+          <p:cNvSpPr txBox="1"/>
+          <p:nvPr/>
+        </p:nvSpPr>
+        <p:spPr>
+          <a:xfrm>
+            <a:off x="685800" y="1133856"/>
+            <a:ext cx="7772400" cy="274320"/>
+          </a:xfrm>
+          <a:prstGeom prst="rect">
+            <a:avLst/>
+          </a:prstGeom>
+          <a:noFill/>
+          <a:effectLst/>
+        </p:spPr>
+        <p:txBody>
+          <a:bodyPr wrap="square" anchor="t" lIns="0" rIns="0" tIns="0" bIns="0">
+            <a:spAutoFit/>
+          </a:bodyPr>
+          <a:lstStyle/>
+          <a:p>
+            <a:pPr algn="l">
+              <a:lnSpc>
+                <a:spcPct val="125000"/>
+              </a:lnSpc>
+              <a:spcAft>
+                <a:spcPts val="0"/>
+              </a:spcAft>
+            </a:pPr>
+            <a:r>
+              <a:rPr sz="1250" b="0" i="0">
+                <a:solidFill>
+                  <a:srgbClr val="56524B"/>
+                </a:solidFill>
+                <a:latin typeface="Calibri"/>
+              </a:rPr>
+              <a:t>Work them out in your group. Write your working on your evidence sheet.</a:t>
+            </a:r>
+          </a:p>
+        </p:txBody>
+      </p:sp>
+      <p:sp>
+        <p:nvSpPr>
+          <p:cNvPr id="7" name="Rectangle 6"/>
           <p:cNvSpPr/>
           <p:nvPr/>
         </p:nvSpPr>
         <p:spPr>
           <a:xfrm>
-            <a:off x="6406362" y="246888"/>
-            <a:ext cx="2051837" cy="237744"/>
-          </a:xfrm>
-          <a:prstGeom prst="roundRect">
-            <a:avLst>
-              <a:gd name="adj" fmla="val 50000"/>
-            </a:avLst>
+            <a:off x="685800" y="1481328"/>
+            <a:ext cx="7772400" cy="699516"/>
+          </a:xfrm>
+          <a:prstGeom prst="rect">
+            <a:avLst/>
+          </a:prstGeom>
+          <a:solidFill>
+            <a:srgbClr val="FFFFFF"/>
+          </a:solidFill>
+          <a:ln>
+            <a:noFill/>
+          </a:ln>
+          <a:effectLst/>
+        </p:spPr>
+        <p:style>
+          <a:lnRef idx="1">
+            <a:schemeClr val="accent1"/>
+          </a:lnRef>
+          <a:fillRef idx="3">
+            <a:schemeClr val="accent1"/>
+          </a:fillRef>
+          <a:effectRef idx="0">
+            <a:schemeClr val="accent1"/>
+          </a:effectRef>
+          <a:fontRef idx="minor">
+            <a:schemeClr val="lt1"/>
+          </a:fontRef>
+        </p:style>
+        <p:txBody>
+          <a:bodyPr rtlCol="0" anchor="ctr"/>
+          <a:lstStyle/>
+          <a:p>
+            <a:pPr algn="ctr"/>
+          </a:p>
+        </p:txBody>
+      </p:sp>
+      <p:sp>
+        <p:nvSpPr>
+          <p:cNvPr id="8" name="Oval 7"/>
+          <p:cNvSpPr/>
+          <p:nvPr/>
+        </p:nvSpPr>
+        <p:spPr>
+          <a:xfrm>
+            <a:off x="868680" y="1563624"/>
+            <a:ext cx="329184" cy="329184"/>
+          </a:xfrm>
+          <a:prstGeom prst="ellipse">
+            <a:avLst/>
           </a:prstGeom>
           <a:solidFill>
             <a:srgbClr val="34322F"/>
@@ -5016,32 +5144,66 @@
           </a:fontRef>
         </p:style>
         <p:txBody>
-          <a:bodyPr rtlCol="0" anchor="ctr" wrap="none" lIns="0" rIns="0" tIns="0" bIns="0"/>
+          <a:bodyPr rtlCol="0" anchor="ctr"/>
           <a:lstStyle/>
           <a:p>
             <a:pPr algn="ctr"/>
-            <a:r>
-              <a:rPr sz="950" b="1" spc="90">
+          </a:p>
+        </p:txBody>
+      </p:sp>
+      <p:sp>
+        <p:nvSpPr>
+          <p:cNvPr id="9" name="TextBox 8"/>
+          <p:cNvSpPr txBox="1"/>
+          <p:nvPr/>
+        </p:nvSpPr>
+        <p:spPr>
+          <a:xfrm>
+            <a:off x="868680" y="1636776"/>
+            <a:ext cx="329184" cy="182880"/>
+          </a:xfrm>
+          <a:prstGeom prst="rect">
+            <a:avLst/>
+          </a:prstGeom>
+          <a:noFill/>
+          <a:effectLst/>
+        </p:spPr>
+        <p:txBody>
+          <a:bodyPr wrap="square" anchor="t" lIns="0" rIns="0" tIns="0" bIns="0">
+            <a:spAutoFit/>
+          </a:bodyPr>
+          <a:lstStyle/>
+          <a:p>
+            <a:pPr algn="ctr">
+              <a:lnSpc>
+                <a:spcPct val="125000"/>
+              </a:lnSpc>
+              <a:spcAft>
+                <a:spcPts val="0"/>
+              </a:spcAft>
+            </a:pPr>
+            <a:r>
+              <a:rPr sz="1050" b="1" i="0">
                 <a:solidFill>
                   <a:srgbClr val="FFFDF7"/>
                 </a:solidFill>
-                <a:latin typeface="Karla"/>
-              </a:rPr>
-              <a:t>CRUNCH THE NUMBERS</a:t>
-            </a:r>
-          </a:p>
-        </p:txBody>
-      </p:sp>
-      <p:sp>
-        <p:nvSpPr>
-          <p:cNvPr id="5" name="TextBox 4"/>
-          <p:cNvSpPr txBox="1"/>
-          <p:nvPr/>
-        </p:nvSpPr>
-        <p:spPr>
-          <a:xfrm>
-            <a:off x="685800" y="566928"/>
-            <a:ext cx="7772400" cy="434848"/>
+                <a:latin typeface="Calibri"/>
+              </a:rPr>
+              <a:t>1</a:t>
+            </a:r>
+          </a:p>
+        </p:txBody>
+      </p:sp>
+      <p:sp>
+        <p:nvSpPr>
+          <p:cNvPr id="10" name="TextBox 9"/>
+          <p:cNvSpPr txBox="1"/>
+          <p:nvPr/>
+        </p:nvSpPr>
+        <p:spPr>
+          <a:xfrm>
+            <a:off x="1371600" y="1591056"/>
+            <a:ext cx="6903720" cy="480060"/>
           </a:xfrm>
           <a:prstGeom prst="rect">
             <a:avLst/>
@@ -5057,77 +5219,34 @@
           <a:p>
             <a:pPr algn="l">
               <a:lnSpc>
-                <a:spcPct val="105000"/>
-              </a:lnSpc>
-              <a:spcAft>
-                <a:spcPts val="0"/>
-              </a:spcAft>
-            </a:pPr>
-            <a:r>
-              <a:rPr sz="2800" b="1" i="0">
+                <a:spcPct val="120000"/>
+              </a:lnSpc>
+              <a:spcAft>
+                <a:spcPts val="0"/>
+              </a:spcAft>
+            </a:pPr>
+            <a:r>
+              <a:rPr sz="1500" b="1" i="0">
                 <a:solidFill>
                   <a:srgbClr val="262422"/>
                 </a:solidFill>
-                <a:latin typeface="Libre Caslon Display"/>
-              </a:rPr>
-              <a:t>What do the numbers say?</a:t>
-            </a:r>
-          </a:p>
-        </p:txBody>
-      </p:sp>
-      <p:sp>
-        <p:nvSpPr>
-          <p:cNvPr id="6" name="TextBox 5"/>
-          <p:cNvSpPr txBox="1"/>
-          <p:nvPr/>
-        </p:nvSpPr>
-        <p:spPr>
-          <a:xfrm>
-            <a:off x="685800" y="1133856"/>
-            <a:ext cx="7772400" cy="274320"/>
-          </a:xfrm>
-          <a:prstGeom prst="rect">
-            <a:avLst/>
-          </a:prstGeom>
-          <a:noFill/>
-          <a:effectLst/>
-        </p:spPr>
-        <p:txBody>
-          <a:bodyPr wrap="square" anchor="t" lIns="0" rIns="0" tIns="0" bIns="0">
-            <a:spAutoFit/>
-          </a:bodyPr>
-          <a:lstStyle/>
-          <a:p>
-            <a:pPr algn="l">
-              <a:lnSpc>
-                <a:spcPct val="125000"/>
-              </a:lnSpc>
-              <a:spcAft>
-                <a:spcPts val="0"/>
-              </a:spcAft>
-            </a:pPr>
-            <a:r>
-              <a:rPr sz="1250" b="0" i="0">
-                <a:solidFill>
-                  <a:srgbClr val="56524B"/>
-                </a:solidFill>
-                <a:latin typeface="Karla"/>
-              </a:rPr>
-              <a:t>Work them out in your group. Write your working on your evidence sheet.</a:t>
-            </a:r>
-          </a:p>
-        </p:txBody>
-      </p:sp>
-      <p:sp>
-        <p:nvSpPr>
-          <p:cNvPr id="7" name="Rectangle 6"/>
+                <a:latin typeface="Calibri"/>
+              </a:rPr>
+              <a:t>About how many times more babies were harmed in the UK (about 2,000) than in the US (17)?</a:t>
+            </a:r>
+          </a:p>
+        </p:txBody>
+      </p:sp>
+      <p:sp>
+        <p:nvSpPr>
+          <p:cNvPr id="11" name="Rectangle 10"/>
           <p:cNvSpPr/>
           <p:nvPr/>
         </p:nvSpPr>
         <p:spPr>
           <a:xfrm>
-            <a:off x="685800" y="1481328"/>
-            <a:ext cx="7772400" cy="699516"/>
+            <a:off x="685800" y="2345436"/>
+            <a:ext cx="7772400" cy="939545"/>
           </a:xfrm>
           <a:prstGeom prst="rect">
             <a:avLst/>
@@ -5164,13 +5283,13 @@
       </p:sp>
       <p:sp>
         <p:nvSpPr>
-          <p:cNvPr id="8" name="Oval 7"/>
+          <p:cNvPr id="12" name="Oval 11"/>
           <p:cNvSpPr/>
           <p:nvPr/>
         </p:nvSpPr>
         <p:spPr>
           <a:xfrm>
-            <a:off x="868680" y="1563624"/>
+            <a:off x="868680" y="2427732"/>
             <a:ext cx="329184" cy="329184"/>
           </a:xfrm>
           <a:prstGeom prst="ellipse">
@@ -5208,13 +5327,13 @@
       </p:sp>
       <p:sp>
         <p:nvSpPr>
-          <p:cNvPr id="9" name="TextBox 8"/>
-          <p:cNvSpPr txBox="1"/>
-          <p:nvPr/>
-        </p:nvSpPr>
-        <p:spPr>
-          <a:xfrm>
-            <a:off x="868680" y="1636776"/>
+          <p:cNvPr id="13" name="TextBox 12"/>
+          <p:cNvSpPr txBox="1"/>
+          <p:nvPr/>
+        </p:nvSpPr>
+        <p:spPr>
+          <a:xfrm>
+            <a:off x="868680" y="2500884"/>
             <a:ext cx="329184" cy="182880"/>
           </a:xfrm>
           <a:prstGeom prst="rect">
@@ -5242,23 +5361,23 @@
                 <a:solidFill>
                   <a:srgbClr val="FFFDF7"/>
                 </a:solidFill>
-                <a:latin typeface="Karla"/>
-              </a:rPr>
-              <a:t>1</a:t>
-            </a:r>
-          </a:p>
-        </p:txBody>
-      </p:sp>
-      <p:sp>
-        <p:nvSpPr>
-          <p:cNvPr id="10" name="TextBox 9"/>
-          <p:cNvSpPr txBox="1"/>
-          <p:nvPr/>
-        </p:nvSpPr>
-        <p:spPr>
-          <a:xfrm>
-            <a:off x="1371600" y="1591056"/>
-            <a:ext cx="6903720" cy="480060"/>
+                <a:latin typeface="Calibri"/>
+              </a:rPr>
+              <a:t>2</a:t>
+            </a:r>
+          </a:p>
+        </p:txBody>
+      </p:sp>
+      <p:sp>
+        <p:nvSpPr>
+          <p:cNvPr id="14" name="TextBox 13"/>
+          <p:cNvSpPr txBox="1"/>
+          <p:nvPr/>
+        </p:nvSpPr>
+        <p:spPr>
+          <a:xfrm>
+            <a:off x="1371600" y="2455164"/>
+            <a:ext cx="6903720" cy="720090"/>
           </a:xfrm>
           <a:prstGeom prst="rect">
             <a:avLst/>
@@ -5285,23 +5404,23 @@
                 <a:solidFill>
                   <a:srgbClr val="262422"/>
                 </a:solidFill>
-                <a:latin typeface="Karla"/>
-              </a:rPr>
-              <a:t>About how many times more babies were harmed in the UK (about 2,000) than in the US (17)?</a:t>
-            </a:r>
-          </a:p>
-        </p:txBody>
-      </p:sp>
-      <p:sp>
-        <p:nvSpPr>
-          <p:cNvPr id="11" name="Rectangle 10"/>
+                <a:latin typeface="Calibri"/>
+              </a:rPr>
+              <a:t>Distaval was on sale in the UK from 1958 to 1961. The advert said it had been prescribed for “nearly three years”. Does that fit?</a:t>
+            </a:r>
+          </a:p>
+        </p:txBody>
+      </p:sp>
+      <p:sp>
+        <p:nvSpPr>
+          <p:cNvPr id="15" name="Rectangle 14"/>
           <p:cNvSpPr/>
           <p:nvPr/>
         </p:nvSpPr>
         <p:spPr>
           <a:xfrm>
-            <a:off x="685800" y="2345436"/>
-            <a:ext cx="7772400" cy="939545"/>
+            <a:off x="685800" y="3449574"/>
+            <a:ext cx="7772400" cy="699516"/>
           </a:xfrm>
           <a:prstGeom prst="rect">
             <a:avLst/>
@@ -5338,13 +5457,13 @@
       </p:sp>
       <p:sp>
         <p:nvSpPr>
-          <p:cNvPr id="12" name="Oval 11"/>
+          <p:cNvPr id="16" name="Oval 15"/>
           <p:cNvSpPr/>
           <p:nvPr/>
         </p:nvSpPr>
         <p:spPr>
           <a:xfrm>
-            <a:off x="868680" y="2427732"/>
+            <a:off x="868680" y="3531870"/>
             <a:ext cx="329184" cy="329184"/>
           </a:xfrm>
           <a:prstGeom prst="ellipse">
@@ -5382,180 +5501,6 @@
       </p:sp>
       <p:sp>
         <p:nvSpPr>
-          <p:cNvPr id="13" name="TextBox 12"/>
-          <p:cNvSpPr txBox="1"/>
-          <p:nvPr/>
-        </p:nvSpPr>
-        <p:spPr>
-          <a:xfrm>
-            <a:off x="868680" y="2500884"/>
-            <a:ext cx="329184" cy="182880"/>
-          </a:xfrm>
-          <a:prstGeom prst="rect">
-            <a:avLst/>
-          </a:prstGeom>
-          <a:noFill/>
-          <a:effectLst/>
-        </p:spPr>
-        <p:txBody>
-          <a:bodyPr wrap="square" anchor="t" lIns="0" rIns="0" tIns="0" bIns="0">
-            <a:spAutoFit/>
-          </a:bodyPr>
-          <a:lstStyle/>
-          <a:p>
-            <a:pPr algn="ctr">
-              <a:lnSpc>
-                <a:spcPct val="125000"/>
-              </a:lnSpc>
-              <a:spcAft>
-                <a:spcPts val="0"/>
-              </a:spcAft>
-            </a:pPr>
-            <a:r>
-              <a:rPr sz="1050" b="1" i="0">
-                <a:solidFill>
-                  <a:srgbClr val="FFFDF7"/>
-                </a:solidFill>
-                <a:latin typeface="Karla"/>
-              </a:rPr>
-              <a:t>2</a:t>
-            </a:r>
-          </a:p>
-        </p:txBody>
-      </p:sp>
-      <p:sp>
-        <p:nvSpPr>
-          <p:cNvPr id="14" name="TextBox 13"/>
-          <p:cNvSpPr txBox="1"/>
-          <p:nvPr/>
-        </p:nvSpPr>
-        <p:spPr>
-          <a:xfrm>
-            <a:off x="1371600" y="2455164"/>
-            <a:ext cx="6903720" cy="720090"/>
-          </a:xfrm>
-          <a:prstGeom prst="rect">
-            <a:avLst/>
-          </a:prstGeom>
-          <a:noFill/>
-          <a:effectLst/>
-        </p:spPr>
-        <p:txBody>
-          <a:bodyPr wrap="square" anchor="t" lIns="0" rIns="0" tIns="0" bIns="0">
-            <a:spAutoFit/>
-          </a:bodyPr>
-          <a:lstStyle/>
-          <a:p>
-            <a:pPr algn="l">
-              <a:lnSpc>
-                <a:spcPct val="120000"/>
-              </a:lnSpc>
-              <a:spcAft>
-                <a:spcPts val="0"/>
-              </a:spcAft>
-            </a:pPr>
-            <a:r>
-              <a:rPr sz="1500" b="1" i="0">
-                <a:solidFill>
-                  <a:srgbClr val="262422"/>
-                </a:solidFill>
-                <a:latin typeface="Karla"/>
-              </a:rPr>
-              <a:t>Distaval was on sale in the UK from 1958 to 1961. The advert said it had been prescribed for “nearly three years”. Does that fit?</a:t>
-            </a:r>
-          </a:p>
-        </p:txBody>
-      </p:sp>
-      <p:sp>
-        <p:nvSpPr>
-          <p:cNvPr id="15" name="Rectangle 14"/>
-          <p:cNvSpPr/>
-          <p:nvPr/>
-        </p:nvSpPr>
-        <p:spPr>
-          <a:xfrm>
-            <a:off x="685800" y="3449574"/>
-            <a:ext cx="7772400" cy="699516"/>
-          </a:xfrm>
-          <a:prstGeom prst="rect">
-            <a:avLst/>
-          </a:prstGeom>
-          <a:solidFill>
-            <a:srgbClr val="FFFFFF"/>
-          </a:solidFill>
-          <a:ln>
-            <a:noFill/>
-          </a:ln>
-          <a:effectLst/>
-        </p:spPr>
-        <p:style>
-          <a:lnRef idx="1">
-            <a:schemeClr val="accent1"/>
-          </a:lnRef>
-          <a:fillRef idx="3">
-            <a:schemeClr val="accent1"/>
-          </a:fillRef>
-          <a:effectRef idx="0">
-            <a:schemeClr val="accent1"/>
-          </a:effectRef>
-          <a:fontRef idx="minor">
-            <a:schemeClr val="lt1"/>
-          </a:fontRef>
-        </p:style>
-        <p:txBody>
-          <a:bodyPr rtlCol="0" anchor="ctr"/>
-          <a:lstStyle/>
-          <a:p>
-            <a:pPr algn="ctr"/>
-          </a:p>
-        </p:txBody>
-      </p:sp>
-      <p:sp>
-        <p:nvSpPr>
-          <p:cNvPr id="16" name="Oval 15"/>
-          <p:cNvSpPr/>
-          <p:nvPr/>
-        </p:nvSpPr>
-        <p:spPr>
-          <a:xfrm>
-            <a:off x="868680" y="3531870"/>
-            <a:ext cx="329184" cy="329184"/>
-          </a:xfrm>
-          <a:prstGeom prst="ellipse">
-            <a:avLst/>
-          </a:prstGeom>
-          <a:solidFill>
-            <a:srgbClr val="34322F"/>
-          </a:solidFill>
-          <a:ln>
-            <a:noFill/>
-          </a:ln>
-          <a:effectLst/>
-        </p:spPr>
-        <p:style>
-          <a:lnRef idx="1">
-            <a:schemeClr val="accent1"/>
-          </a:lnRef>
-          <a:fillRef idx="3">
-            <a:schemeClr val="accent1"/>
-          </a:fillRef>
-          <a:effectRef idx="0">
-            <a:schemeClr val="accent1"/>
-          </a:effectRef>
-          <a:fontRef idx="minor">
-            <a:schemeClr val="lt1"/>
-          </a:fontRef>
-        </p:style>
-        <p:txBody>
-          <a:bodyPr rtlCol="0" anchor="ctr"/>
-          <a:lstStyle/>
-          <a:p>
-            <a:pPr algn="ctr"/>
-          </a:p>
-        </p:txBody>
-      </p:sp>
-      <p:sp>
-        <p:nvSpPr>
           <p:cNvPr id="17" name="TextBox 16"/>
           <p:cNvSpPr txBox="1"/>
           <p:nvPr/>
@@ -5590,7 +5535,7 @@
                 <a:solidFill>
                   <a:srgbClr val="FFFDF7"/>
                 </a:solidFill>
-                <a:latin typeface="Karla"/>
+                <a:latin typeface="Calibri"/>
               </a:rPr>
               <a:t>3</a:t>
             </a:r>
@@ -5633,7 +5578,7 @@
                 <a:solidFill>
                   <a:srgbClr val="262422"/>
                 </a:solidFill>
-                <a:latin typeface="Karla"/>
+                <a:latin typeface="Calibri"/>
               </a:rPr>
               <a:t>Card B says what was tested and what was not. What should have been tested before it was sold for morning sickness?</a:t>
             </a:r>
@@ -5701,7 +5646,7 @@
                 <a:solidFill>
                   <a:srgbClr val="8C877D"/>
                 </a:solidFill>
-                <a:latin typeface="Karla"/>
+                <a:latin typeface="Calibri"/>
               </a:rPr>
               <a:t>The Pastoral Guide</a:t>
             </a:r>
@@ -5744,7 +5689,7 @@
                 <a:solidFill>
                   <a:srgbClr val="8C877D"/>
                 </a:solidFill>
-                <a:latin typeface="Karla"/>
+                <a:latin typeface="Calibri"/>
               </a:rPr>
               <a:t>11 / 19</a:t>
             </a:r>
@@ -5849,7 +5794,7 @@
                 <a:solidFill>
                   <a:srgbClr val="34322F"/>
                 </a:solidFill>
-                <a:latin typeface="Karla"/>
+                <a:latin typeface="Calibri"/>
               </a:rPr>
               <a:t>QUESTION THE HEADLINE  ·  LESSON 2 OF 5</a:t>
             </a:r>
@@ -5904,7 +5849,7 @@
                 <a:solidFill>
                   <a:srgbClr val="FFFDF7"/>
                 </a:solidFill>
-                <a:latin typeface="Karla"/>
+                <a:latin typeface="Calibri"/>
               </a:rPr>
               <a:t>THE ANSWERS</a:t>
             </a:r>
@@ -5943,11 +5888,11 @@
               </a:spcAft>
             </a:pPr>
             <a:r>
-              <a:rPr sz="2800" b="1" i="0">
+              <a:rPr sz="2800" b="0" i="0">
                 <a:solidFill>
                   <a:srgbClr val="262422"/>
                 </a:solidFill>
-                <a:latin typeface="Libre Caslon Display"/>
+                <a:latin typeface="Georgia"/>
               </a:rPr>
               <a:t>Check your working</a:t>
             </a:r>
@@ -5990,7 +5935,7 @@
                 <a:solidFill>
                   <a:srgbClr val="56524B"/>
                 </a:solidFill>
-                <a:latin typeface="Karla"/>
+                <a:latin typeface="Calibri"/>
               </a:rPr>
               <a:t>Mark your own. A different method that gets the same answer is fine.</a:t>
             </a:r>
@@ -6121,7 +6066,7 @@
                 <a:solidFill>
                   <a:srgbClr val="FFFDF7"/>
                 </a:solidFill>
-                <a:latin typeface="Karla"/>
+                <a:latin typeface="Calibri"/>
               </a:rPr>
               <a:t>1</a:t>
             </a:r>
@@ -6164,7 +6109,7 @@
                 <a:solidFill>
                   <a:srgbClr val="262422"/>
                 </a:solidFill>
-                <a:latin typeface="Karla"/>
+                <a:latin typeface="Calibri"/>
               </a:rPr>
               <a:t>About how many times more babies were harmed in the UK (about 2,000) than in the US (17)?</a:t>
             </a:r>
@@ -6207,7 +6152,7 @@
                 <a:solidFill>
                   <a:srgbClr val="34322F"/>
                 </a:solidFill>
-                <a:latin typeface="Karla"/>
+                <a:latin typeface="Calibri"/>
               </a:rPr>
               <a:t>About 118 times (2,000 ÷ 17 = 117.6).</a:t>
             </a:r>
@@ -6338,7 +6283,7 @@
                 <a:solidFill>
                   <a:srgbClr val="FFFDF7"/>
                 </a:solidFill>
-                <a:latin typeface="Karla"/>
+                <a:latin typeface="Calibri"/>
               </a:rPr>
               <a:t>2</a:t>
             </a:r>
@@ -6381,7 +6326,7 @@
                 <a:solidFill>
                   <a:srgbClr val="262422"/>
                 </a:solidFill>
-                <a:latin typeface="Karla"/>
+                <a:latin typeface="Calibri"/>
               </a:rPr>
               <a:t>Distaval was on sale in the UK from 1958 to 1961. The advert said it had been prescribed for “nearly three years”. Does that fit?</a:t>
             </a:r>
@@ -6424,7 +6369,7 @@
                 <a:solidFill>
                   <a:srgbClr val="34322F"/>
                 </a:solidFill>
-                <a:latin typeface="Karla"/>
+                <a:latin typeface="Calibri"/>
               </a:rPr>
               <a:t>Yes: 1958 to 1961 is about three years, so the advert ran near the end, when the harm was already happening.</a:t>
             </a:r>
@@ -6555,7 +6500,7 @@
                 <a:solidFill>
                   <a:srgbClr val="FFFDF7"/>
                 </a:solidFill>
-                <a:latin typeface="Karla"/>
+                <a:latin typeface="Calibri"/>
               </a:rPr>
               <a:t>3</a:t>
             </a:r>
@@ -6598,7 +6543,7 @@
                 <a:solidFill>
                   <a:srgbClr val="262422"/>
                 </a:solidFill>
-                <a:latin typeface="Karla"/>
+                <a:latin typeface="Calibri"/>
               </a:rPr>
               <a:t>Card B says what was tested and what was not. What should have been tested before it was sold for morning sickness?</a:t>
             </a:r>
@@ -6641,7 +6586,7 @@
                 <a:solidFill>
                   <a:srgbClr val="34322F"/>
                 </a:solidFill>
-                <a:latin typeface="Karla"/>
+                <a:latin typeface="Calibri"/>
               </a:rPr>
               <a:t>What the drug did to a baby before birth.</a:t>
             </a:r>
@@ -6709,7 +6654,7 @@
                 <a:solidFill>
                   <a:srgbClr val="8C877D"/>
                 </a:solidFill>
-                <a:latin typeface="Karla"/>
+                <a:latin typeface="Calibri"/>
               </a:rPr>
               <a:t>The Pastoral Guide</a:t>
             </a:r>
@@ -6752,7 +6697,7 @@
                 <a:solidFill>
                   <a:srgbClr val="8C877D"/>
                 </a:solidFill>
-                <a:latin typeface="Karla"/>
+                <a:latin typeface="Calibri"/>
               </a:rPr>
               <a:t>12 / 19</a:t>
             </a:r>
@@ -6857,7 +6802,7 @@
                 <a:solidFill>
                   <a:srgbClr val="34322F"/>
                 </a:solidFill>
-                <a:latin typeface="Karla"/>
+                <a:latin typeface="Calibri"/>
               </a:rPr>
               <a:t>QUESTION THE HEADLINE  ·  LESSON 2 OF 5</a:t>
             </a:r>
@@ -6912,7 +6857,7 @@
                 <a:solidFill>
                   <a:srgbClr val="FFFDF7"/>
                 </a:solidFill>
-                <a:latin typeface="Karla"/>
+                <a:latin typeface="Calibri"/>
               </a:rPr>
               <a:t>ROUND 4 OF 4</a:t>
             </a:r>
@@ -6999,7 +6944,7 @@
                 <a:solidFill>
                   <a:srgbClr val="FFFDF7"/>
                 </a:solidFill>
-                <a:latin typeface="Karla"/>
+                <a:latin typeface="Calibri"/>
               </a:rPr>
               <a:t>EVIDENCE D</a:t>
             </a:r>
@@ -7126,11 +7071,11 @@
               </a:spcAft>
             </a:pPr>
             <a:r>
-              <a:rPr sz="2200" b="1" i="0">
+              <a:rPr sz="2200" b="0" i="0">
                 <a:solidFill>
                   <a:srgbClr val="262422"/>
                 </a:solidFill>
-                <a:latin typeface="Libre Caslon Display"/>
+                <a:latin typeface="Georgia"/>
               </a:rPr>
               <a:t>The official who said no</a:t>
             </a:r>
@@ -7216,7 +7161,7 @@
                 <a:solidFill>
                   <a:srgbClr val="8C877D"/>
                 </a:solidFill>
-                <a:latin typeface="Karla"/>
+                <a:latin typeface="Calibri"/>
               </a:rPr>
               <a:t>Source: UChicago Medicine, 2020; Smithsonian, 2017</a:t>
             </a:r>
@@ -7259,7 +7204,7 @@
                 <a:solidFill>
                   <a:srgbClr val="34322F"/>
                 </a:solidFill>
-                <a:latin typeface="Karla"/>
+                <a:latin typeface="Calibri"/>
               </a:rPr>
               <a:t>Read it as a group. Fill in the card D row on your evidence sheet, then move on the line.</a:t>
             </a:r>
@@ -7327,7 +7272,7 @@
                 <a:solidFill>
                   <a:srgbClr val="8C877D"/>
                 </a:solidFill>
-                <a:latin typeface="Karla"/>
+                <a:latin typeface="Calibri"/>
               </a:rPr>
               <a:t>The Pastoral Guide</a:t>
             </a:r>
@@ -7370,7 +7315,7 @@
                 <a:solidFill>
                   <a:srgbClr val="8C877D"/>
                 </a:solidFill>
-                <a:latin typeface="Karla"/>
+                <a:latin typeface="Calibri"/>
               </a:rPr>
               <a:t>13 / 19</a:t>
             </a:r>
@@ -7475,7 +7420,7 @@
                 <a:solidFill>
                   <a:srgbClr val="34322F"/>
                 </a:solidFill>
-                <a:latin typeface="Karla"/>
+                <a:latin typeface="Calibri"/>
               </a:rPr>
               <a:t>QUESTION THE HEADLINE  ·  LESSON 2 OF 5</a:t>
             </a:r>
@@ -7484,19 +7429,147 @@
       </p:sp>
       <p:sp>
         <p:nvSpPr>
-          <p:cNvPr id="4" name="Rounded Rectangle 3"/>
+          <p:cNvPr id="5" name="TextBox 4"/>
+          <p:cNvSpPr txBox="1"/>
+          <p:nvPr/>
+        </p:nvSpPr>
+        <p:spPr>
+          <a:xfrm>
+            <a:off x="685800" y="566928"/>
+            <a:ext cx="7772400" cy="434848"/>
+          </a:xfrm>
+          <a:prstGeom prst="rect">
+            <a:avLst/>
+          </a:prstGeom>
+          <a:noFill/>
+          <a:effectLst/>
+        </p:spPr>
+        <p:txBody>
+          <a:bodyPr wrap="square" anchor="t" lIns="0" rIns="0" tIns="0" bIns="0">
+            <a:spAutoFit/>
+          </a:bodyPr>
+          <a:lstStyle/>
+          <a:p>
+            <a:pPr algn="l">
+              <a:lnSpc>
+                <a:spcPct val="105000"/>
+              </a:lnSpc>
+              <a:spcAft>
+                <a:spcPts val="0"/>
+              </a:spcAft>
+            </a:pPr>
+            <a:r>
+              <a:rPr sz="2800" b="0" i="0">
+                <a:solidFill>
+                  <a:srgbClr val="262422"/>
+                </a:solidFill>
+                <a:latin typeface="Georgia"/>
+              </a:rPr>
+              <a:t>Write the real front page</a:t>
+            </a:r>
+          </a:p>
+        </p:txBody>
+      </p:sp>
+      <p:sp>
+        <p:nvSpPr>
+          <p:cNvPr id="6" name="TextBox 5"/>
+          <p:cNvSpPr txBox="1"/>
+          <p:nvPr/>
+        </p:nvSpPr>
+        <p:spPr>
+          <a:xfrm>
+            <a:off x="685800" y="1115568"/>
+            <a:ext cx="7772400" cy="274320"/>
+          </a:xfrm>
+          <a:prstGeom prst="rect">
+            <a:avLst/>
+          </a:prstGeom>
+          <a:noFill/>
+          <a:effectLst/>
+        </p:spPr>
+        <p:txBody>
+          <a:bodyPr wrap="square" anchor="t" lIns="0" rIns="0" tIns="0" bIns="0">
+            <a:spAutoFit/>
+          </a:bodyPr>
+          <a:lstStyle/>
+          <a:p>
+            <a:pPr algn="l">
+              <a:lnSpc>
+                <a:spcPct val="125000"/>
+              </a:lnSpc>
+              <a:spcAft>
+                <a:spcPts val="0"/>
+              </a:spcAft>
+            </a:pPr>
+            <a:r>
+              <a:rPr sz="1300" b="0" i="0">
+                <a:solidFill>
+                  <a:srgbClr val="56524B"/>
+                </a:solidFill>
+                <a:latin typeface="Calibri"/>
+              </a:rPr>
+              <a:t>On your front page sheet, on your own or with one partner.</a:t>
+            </a:r>
+          </a:p>
+        </p:txBody>
+      </p:sp>
+      <p:sp>
+        <p:nvSpPr>
+          <p:cNvPr id="7" name="Rectangle 6"/>
           <p:cNvSpPr/>
           <p:nvPr/>
         </p:nvSpPr>
         <p:spPr>
           <a:xfrm>
-            <a:off x="7280579" y="246888"/>
-            <a:ext cx="1177620" cy="237744"/>
-          </a:xfrm>
-          <a:prstGeom prst="roundRect">
-            <a:avLst>
-              <a:gd name="adj" fmla="val 50000"/>
-            </a:avLst>
+            <a:off x="685800" y="1499616"/>
+            <a:ext cx="7772400" cy="676656"/>
+          </a:xfrm>
+          <a:prstGeom prst="rect">
+            <a:avLst/>
+          </a:prstGeom>
+          <a:solidFill>
+            <a:srgbClr val="FFFDF7"/>
+          </a:solidFill>
+          <a:ln>
+            <a:noFill/>
+          </a:ln>
+          <a:effectLst/>
+        </p:spPr>
+        <p:style>
+          <a:lnRef idx="1">
+            <a:schemeClr val="accent1"/>
+          </a:lnRef>
+          <a:fillRef idx="3">
+            <a:schemeClr val="accent1"/>
+          </a:fillRef>
+          <a:effectRef idx="0">
+            <a:schemeClr val="accent1"/>
+          </a:effectRef>
+          <a:fontRef idx="minor">
+            <a:schemeClr val="lt1"/>
+          </a:fontRef>
+        </p:style>
+        <p:txBody>
+          <a:bodyPr rtlCol="0" anchor="ctr"/>
+          <a:lstStyle/>
+          <a:p>
+            <a:pPr algn="ctr"/>
+          </a:p>
+        </p:txBody>
+      </p:sp>
+      <p:sp>
+        <p:nvSpPr>
+          <p:cNvPr id="8" name="Oval 7"/>
+          <p:cNvSpPr/>
+          <p:nvPr/>
+        </p:nvSpPr>
+        <p:spPr>
+          <a:xfrm>
+            <a:off x="868680" y="1636775"/>
+            <a:ext cx="402336" cy="402336"/>
+          </a:xfrm>
+          <a:prstGeom prst="ellipse">
+            <a:avLst/>
           </a:prstGeom>
           <a:solidFill>
             <a:srgbClr val="34322F"/>
@@ -7521,32 +7594,66 @@
           </a:fontRef>
         </p:style>
         <p:txBody>
-          <a:bodyPr rtlCol="0" anchor="ctr" wrap="none" lIns="0" rIns="0" tIns="0" bIns="0"/>
+          <a:bodyPr rtlCol="0" anchor="ctr"/>
           <a:lstStyle/>
           <a:p>
             <a:pPr algn="ctr"/>
-            <a:r>
-              <a:rPr sz="950" b="1" spc="90">
+          </a:p>
+        </p:txBody>
+      </p:sp>
+      <p:sp>
+        <p:nvSpPr>
+          <p:cNvPr id="9" name="TextBox 8"/>
+          <p:cNvSpPr txBox="1"/>
+          <p:nvPr/>
+        </p:nvSpPr>
+        <p:spPr>
+          <a:xfrm>
+            <a:off x="868680" y="1732787"/>
+            <a:ext cx="402336" cy="219456"/>
+          </a:xfrm>
+          <a:prstGeom prst="rect">
+            <a:avLst/>
+          </a:prstGeom>
+          <a:noFill/>
+          <a:effectLst/>
+        </p:spPr>
+        <p:txBody>
+          <a:bodyPr wrap="square" anchor="t" lIns="0" rIns="0" tIns="0" bIns="0">
+            <a:spAutoFit/>
+          </a:bodyPr>
+          <a:lstStyle/>
+          <a:p>
+            <a:pPr algn="ctr">
+              <a:lnSpc>
+                <a:spcPct val="125000"/>
+              </a:lnSpc>
+              <a:spcAft>
+                <a:spcPts val="0"/>
+              </a:spcAft>
+            </a:pPr>
+            <a:r>
+              <a:rPr sz="1150" b="1" i="0">
                 <a:solidFill>
                   <a:srgbClr val="FFFDF7"/>
                 </a:solidFill>
-                <a:latin typeface="Karla"/>
-              </a:rPr>
-              <a:t>YOUR TURN</a:t>
-            </a:r>
-          </a:p>
-        </p:txBody>
-      </p:sp>
-      <p:sp>
-        <p:nvSpPr>
-          <p:cNvPr id="5" name="TextBox 4"/>
-          <p:cNvSpPr txBox="1"/>
-          <p:nvPr/>
-        </p:nvSpPr>
-        <p:spPr>
-          <a:xfrm>
-            <a:off x="685800" y="566928"/>
-            <a:ext cx="7772400" cy="434848"/>
+                <a:latin typeface="Calibri"/>
+              </a:rPr>
+              <a:t>1</a:t>
+            </a:r>
+          </a:p>
+        </p:txBody>
+      </p:sp>
+      <p:sp>
+        <p:nvSpPr>
+          <p:cNvPr id="10" name="TextBox 9"/>
+          <p:cNvSpPr txBox="1"/>
+          <p:nvPr/>
+        </p:nvSpPr>
+        <p:spPr>
+          <a:xfrm>
+            <a:off x="1417320" y="1600200"/>
+            <a:ext cx="6821424" cy="237744"/>
           </a:xfrm>
           <a:prstGeom prst="rect">
             <a:avLst/>
@@ -7562,34 +7669,34 @@
           <a:p>
             <a:pPr algn="l">
               <a:lnSpc>
-                <a:spcPct val="105000"/>
-              </a:lnSpc>
-              <a:spcAft>
-                <a:spcPts val="0"/>
-              </a:spcAft>
-            </a:pPr>
-            <a:r>
-              <a:rPr sz="2800" b="1" i="0">
-                <a:solidFill>
-                  <a:srgbClr val="262422"/>
-                </a:solidFill>
-                <a:latin typeface="Libre Caslon Display"/>
-              </a:rPr>
-              <a:t>Write the real front page</a:t>
-            </a:r>
-          </a:p>
-        </p:txBody>
-      </p:sp>
-      <p:sp>
-        <p:nvSpPr>
-          <p:cNvPr id="6" name="TextBox 5"/>
-          <p:cNvSpPr txBox="1"/>
-          <p:nvPr/>
-        </p:nvSpPr>
-        <p:spPr>
-          <a:xfrm>
-            <a:off x="685800" y="1115568"/>
-            <a:ext cx="7772400" cy="274320"/>
+                <a:spcPct val="125000"/>
+              </a:lnSpc>
+              <a:spcAft>
+                <a:spcPts val="0"/>
+              </a:spcAft>
+            </a:pPr>
+            <a:r>
+              <a:rPr sz="1300" b="0" i="0">
+                <a:solidFill>
+                  <a:srgbClr val="34322F"/>
+                </a:solidFill>
+                <a:latin typeface="Georgia"/>
+              </a:rPr>
+              <a:t>A headline that is true to the evidence</a:t>
+            </a:r>
+          </a:p>
+        </p:txBody>
+      </p:sp>
+      <p:sp>
+        <p:nvSpPr>
+          <p:cNvPr id="11" name="TextBox 10"/>
+          <p:cNvSpPr txBox="1"/>
+          <p:nvPr/>
+        </p:nvSpPr>
+        <p:spPr>
+          <a:xfrm>
+            <a:off x="1417320" y="1847088"/>
+            <a:ext cx="6821424" cy="256031"/>
           </a:xfrm>
           <a:prstGeom prst="rect">
             <a:avLst/>
@@ -7612,26 +7719,26 @@
               </a:spcAft>
             </a:pPr>
             <a:r>
-              <a:rPr sz="1300" b="0" i="0">
+              <a:rPr sz="1100" b="0" i="0">
                 <a:solidFill>
                   <a:srgbClr val="56524B"/>
                 </a:solidFill>
-                <a:latin typeface="Karla"/>
-              </a:rPr>
-              <a:t>On your front page sheet, on your own or with one partner.</a:t>
-            </a:r>
-          </a:p>
-        </p:txBody>
-      </p:sp>
-      <p:sp>
-        <p:nvSpPr>
-          <p:cNvPr id="7" name="Rectangle 6"/>
+                <a:latin typeface="Calibri"/>
+              </a:rPr>
+              <a:t>No bigger than the evidence. If you are not sure, the headline can say so.</a:t>
+            </a:r>
+          </a:p>
+        </p:txBody>
+      </p:sp>
+      <p:sp>
+        <p:nvSpPr>
+          <p:cNvPr id="12" name="Rectangle 11"/>
           <p:cNvSpPr/>
           <p:nvPr/>
         </p:nvSpPr>
         <p:spPr>
           <a:xfrm>
-            <a:off x="685800" y="1499616"/>
+            <a:off x="685800" y="2304288"/>
             <a:ext cx="7772400" cy="676656"/>
           </a:xfrm>
           <a:prstGeom prst="rect">
@@ -7669,13 +7776,13 @@
       </p:sp>
       <p:sp>
         <p:nvSpPr>
-          <p:cNvPr id="8" name="Oval 7"/>
+          <p:cNvPr id="13" name="Oval 12"/>
           <p:cNvSpPr/>
           <p:nvPr/>
         </p:nvSpPr>
         <p:spPr>
           <a:xfrm>
-            <a:off x="868680" y="1636775"/>
+            <a:off x="868680" y="2441448"/>
             <a:ext cx="402336" cy="402336"/>
           </a:xfrm>
           <a:prstGeom prst="ellipse">
@@ -7713,13 +7820,13 @@
       </p:sp>
       <p:sp>
         <p:nvSpPr>
-          <p:cNvPr id="9" name="TextBox 8"/>
-          <p:cNvSpPr txBox="1"/>
-          <p:nvPr/>
-        </p:nvSpPr>
-        <p:spPr>
-          <a:xfrm>
-            <a:off x="868680" y="1732787"/>
+          <p:cNvPr id="14" name="TextBox 13"/>
+          <p:cNvSpPr txBox="1"/>
+          <p:nvPr/>
+        </p:nvSpPr>
+        <p:spPr>
+          <a:xfrm>
+            <a:off x="868680" y="2537460"/>
             <a:ext cx="402336" cy="219456"/>
           </a:xfrm>
           <a:prstGeom prst="rect">
@@ -7747,22 +7854,22 @@
                 <a:solidFill>
                   <a:srgbClr val="FFFDF7"/>
                 </a:solidFill>
-                <a:latin typeface="Karla"/>
-              </a:rPr>
-              <a:t>1</a:t>
-            </a:r>
-          </a:p>
-        </p:txBody>
-      </p:sp>
-      <p:sp>
-        <p:nvSpPr>
-          <p:cNvPr id="10" name="TextBox 9"/>
-          <p:cNvSpPr txBox="1"/>
-          <p:nvPr/>
-        </p:nvSpPr>
-        <p:spPr>
-          <a:xfrm>
-            <a:off x="1417320" y="1600200"/>
+                <a:latin typeface="Calibri"/>
+              </a:rPr>
+              <a:t>2</a:t>
+            </a:r>
+          </a:p>
+        </p:txBody>
+      </p:sp>
+      <p:sp>
+        <p:nvSpPr>
+          <p:cNvPr id="15" name="TextBox 14"/>
+          <p:cNvSpPr txBox="1"/>
+          <p:nvPr/>
+        </p:nvSpPr>
+        <p:spPr>
+          <a:xfrm>
+            <a:off x="1417320" y="2404872"/>
             <a:ext cx="6821424" cy="237744"/>
           </a:xfrm>
           <a:prstGeom prst="rect">
@@ -7786,26 +7893,26 @@
               </a:spcAft>
             </a:pPr>
             <a:r>
-              <a:rPr sz="1300" b="1" i="0">
+              <a:rPr sz="1300" b="0" i="0">
                 <a:solidFill>
                   <a:srgbClr val="34322F"/>
                 </a:solidFill>
-                <a:latin typeface="Libre Caslon Display"/>
-              </a:rPr>
-              <a:t>A headline that is true to the evidence</a:t>
-            </a:r>
-          </a:p>
-        </p:txBody>
-      </p:sp>
-      <p:sp>
-        <p:nvSpPr>
-          <p:cNvPr id="11" name="TextBox 10"/>
-          <p:cNvSpPr txBox="1"/>
-          <p:nvPr/>
-        </p:nvSpPr>
-        <p:spPr>
-          <a:xfrm>
-            <a:off x="1417320" y="1847088"/>
+                <a:latin typeface="Georgia"/>
+              </a:rPr>
+              <a:t>One line under it that sums up the story</a:t>
+            </a:r>
+          </a:p>
+        </p:txBody>
+      </p:sp>
+      <p:sp>
+        <p:nvSpPr>
+          <p:cNvPr id="16" name="TextBox 15"/>
+          <p:cNvSpPr txBox="1"/>
+          <p:nvPr/>
+        </p:nvSpPr>
+        <p:spPr>
+          <a:xfrm>
+            <a:off x="1417320" y="2651760"/>
             <a:ext cx="6821424" cy="256031"/>
           </a:xfrm>
           <a:prstGeom prst="rect">
@@ -7833,22 +7940,22 @@
                 <a:solidFill>
                   <a:srgbClr val="56524B"/>
                 </a:solidFill>
-                <a:latin typeface="Karla"/>
-              </a:rPr>
-              <a:t>No bigger than the evidence. If you are not sure, the headline can say so.</a:t>
-            </a:r>
-          </a:p>
-        </p:txBody>
-      </p:sp>
-      <p:sp>
-        <p:nvSpPr>
-          <p:cNvPr id="12" name="Rectangle 11"/>
+                <a:latin typeface="Calibri"/>
+              </a:rPr>
+              <a:t>Who made the claim, and what they stood to gain.</a:t>
+            </a:r>
+          </a:p>
+        </p:txBody>
+      </p:sp>
+      <p:sp>
+        <p:nvSpPr>
+          <p:cNvPr id="17" name="Rectangle 16"/>
           <p:cNvSpPr/>
           <p:nvPr/>
         </p:nvSpPr>
         <p:spPr>
           <a:xfrm>
-            <a:off x="685800" y="2304288"/>
+            <a:off x="685800" y="3108960"/>
             <a:ext cx="7772400" cy="676656"/>
           </a:xfrm>
           <a:prstGeom prst="rect">
@@ -7886,13 +7993,13 @@
       </p:sp>
       <p:sp>
         <p:nvSpPr>
-          <p:cNvPr id="13" name="Oval 12"/>
+          <p:cNvPr id="18" name="Oval 17"/>
           <p:cNvSpPr/>
           <p:nvPr/>
         </p:nvSpPr>
         <p:spPr>
           <a:xfrm>
-            <a:off x="868680" y="2441448"/>
+            <a:off x="868680" y="3246120"/>
             <a:ext cx="402336" cy="402336"/>
           </a:xfrm>
           <a:prstGeom prst="ellipse">
@@ -7930,223 +8037,6 @@
       </p:sp>
       <p:sp>
         <p:nvSpPr>
-          <p:cNvPr id="14" name="TextBox 13"/>
-          <p:cNvSpPr txBox="1"/>
-          <p:nvPr/>
-        </p:nvSpPr>
-        <p:spPr>
-          <a:xfrm>
-            <a:off x="868680" y="2537460"/>
-            <a:ext cx="402336" cy="219456"/>
-          </a:xfrm>
-          <a:prstGeom prst="rect">
-            <a:avLst/>
-          </a:prstGeom>
-          <a:noFill/>
-          <a:effectLst/>
-        </p:spPr>
-        <p:txBody>
-          <a:bodyPr wrap="square" anchor="t" lIns="0" rIns="0" tIns="0" bIns="0">
-            <a:spAutoFit/>
-          </a:bodyPr>
-          <a:lstStyle/>
-          <a:p>
-            <a:pPr algn="ctr">
-              <a:lnSpc>
-                <a:spcPct val="125000"/>
-              </a:lnSpc>
-              <a:spcAft>
-                <a:spcPts val="0"/>
-              </a:spcAft>
-            </a:pPr>
-            <a:r>
-              <a:rPr sz="1150" b="1" i="0">
-                <a:solidFill>
-                  <a:srgbClr val="FFFDF7"/>
-                </a:solidFill>
-                <a:latin typeface="Karla"/>
-              </a:rPr>
-              <a:t>2</a:t>
-            </a:r>
-          </a:p>
-        </p:txBody>
-      </p:sp>
-      <p:sp>
-        <p:nvSpPr>
-          <p:cNvPr id="15" name="TextBox 14"/>
-          <p:cNvSpPr txBox="1"/>
-          <p:nvPr/>
-        </p:nvSpPr>
-        <p:spPr>
-          <a:xfrm>
-            <a:off x="1417320" y="2404872"/>
-            <a:ext cx="6821424" cy="237744"/>
-          </a:xfrm>
-          <a:prstGeom prst="rect">
-            <a:avLst/>
-          </a:prstGeom>
-          <a:noFill/>
-          <a:effectLst/>
-        </p:spPr>
-        <p:txBody>
-          <a:bodyPr wrap="square" anchor="t" lIns="0" rIns="0" tIns="0" bIns="0">
-            <a:spAutoFit/>
-          </a:bodyPr>
-          <a:lstStyle/>
-          <a:p>
-            <a:pPr algn="l">
-              <a:lnSpc>
-                <a:spcPct val="125000"/>
-              </a:lnSpc>
-              <a:spcAft>
-                <a:spcPts val="0"/>
-              </a:spcAft>
-            </a:pPr>
-            <a:r>
-              <a:rPr sz="1300" b="1" i="0">
-                <a:solidFill>
-                  <a:srgbClr val="34322F"/>
-                </a:solidFill>
-                <a:latin typeface="Libre Caslon Display"/>
-              </a:rPr>
-              <a:t>One line under it that sums up the story</a:t>
-            </a:r>
-          </a:p>
-        </p:txBody>
-      </p:sp>
-      <p:sp>
-        <p:nvSpPr>
-          <p:cNvPr id="16" name="TextBox 15"/>
-          <p:cNvSpPr txBox="1"/>
-          <p:nvPr/>
-        </p:nvSpPr>
-        <p:spPr>
-          <a:xfrm>
-            <a:off x="1417320" y="2651760"/>
-            <a:ext cx="6821424" cy="256031"/>
-          </a:xfrm>
-          <a:prstGeom prst="rect">
-            <a:avLst/>
-          </a:prstGeom>
-          <a:noFill/>
-          <a:effectLst/>
-        </p:spPr>
-        <p:txBody>
-          <a:bodyPr wrap="square" anchor="t" lIns="0" rIns="0" tIns="0" bIns="0">
-            <a:spAutoFit/>
-          </a:bodyPr>
-          <a:lstStyle/>
-          <a:p>
-            <a:pPr algn="l">
-              <a:lnSpc>
-                <a:spcPct val="125000"/>
-              </a:lnSpc>
-              <a:spcAft>
-                <a:spcPts val="0"/>
-              </a:spcAft>
-            </a:pPr>
-            <a:r>
-              <a:rPr sz="1100" b="0" i="0">
-                <a:solidFill>
-                  <a:srgbClr val="56524B"/>
-                </a:solidFill>
-                <a:latin typeface="Karla"/>
-              </a:rPr>
-              <a:t>Who made the claim, and what they stood to gain.</a:t>
-            </a:r>
-          </a:p>
-        </p:txBody>
-      </p:sp>
-      <p:sp>
-        <p:nvSpPr>
-          <p:cNvPr id="17" name="Rectangle 16"/>
-          <p:cNvSpPr/>
-          <p:nvPr/>
-        </p:nvSpPr>
-        <p:spPr>
-          <a:xfrm>
-            <a:off x="685800" y="3108960"/>
-            <a:ext cx="7772400" cy="676656"/>
-          </a:xfrm>
-          <a:prstGeom prst="rect">
-            <a:avLst/>
-          </a:prstGeom>
-          <a:solidFill>
-            <a:srgbClr val="FFFDF7"/>
-          </a:solidFill>
-          <a:ln>
-            <a:noFill/>
-          </a:ln>
-          <a:effectLst/>
-        </p:spPr>
-        <p:style>
-          <a:lnRef idx="1">
-            <a:schemeClr val="accent1"/>
-          </a:lnRef>
-          <a:fillRef idx="3">
-            <a:schemeClr val="accent1"/>
-          </a:fillRef>
-          <a:effectRef idx="0">
-            <a:schemeClr val="accent1"/>
-          </a:effectRef>
-          <a:fontRef idx="minor">
-            <a:schemeClr val="lt1"/>
-          </a:fontRef>
-        </p:style>
-        <p:txBody>
-          <a:bodyPr rtlCol="0" anchor="ctr"/>
-          <a:lstStyle/>
-          <a:p>
-            <a:pPr algn="ctr"/>
-          </a:p>
-        </p:txBody>
-      </p:sp>
-      <p:sp>
-        <p:nvSpPr>
-          <p:cNvPr id="18" name="Oval 17"/>
-          <p:cNvSpPr/>
-          <p:nvPr/>
-        </p:nvSpPr>
-        <p:spPr>
-          <a:xfrm>
-            <a:off x="868680" y="3246120"/>
-            <a:ext cx="402336" cy="402336"/>
-          </a:xfrm>
-          <a:prstGeom prst="ellipse">
-            <a:avLst/>
-          </a:prstGeom>
-          <a:solidFill>
-            <a:srgbClr val="34322F"/>
-          </a:solidFill>
-          <a:ln>
-            <a:noFill/>
-          </a:ln>
-          <a:effectLst/>
-        </p:spPr>
-        <p:style>
-          <a:lnRef idx="1">
-            <a:schemeClr val="accent1"/>
-          </a:lnRef>
-          <a:fillRef idx="3">
-            <a:schemeClr val="accent1"/>
-          </a:fillRef>
-          <a:effectRef idx="0">
-            <a:schemeClr val="accent1"/>
-          </a:effectRef>
-          <a:fontRef idx="minor">
-            <a:schemeClr val="lt1"/>
-          </a:fontRef>
-        </p:style>
-        <p:txBody>
-          <a:bodyPr rtlCol="0" anchor="ctr"/>
-          <a:lstStyle/>
-          <a:p>
-            <a:pPr algn="ctr"/>
-          </a:p>
-        </p:txBody>
-      </p:sp>
-      <p:sp>
-        <p:nvSpPr>
           <p:cNvPr id="19" name="TextBox 18"/>
           <p:cNvSpPr txBox="1"/>
           <p:nvPr/>
@@ -8181,7 +8071,7 @@
                 <a:solidFill>
                   <a:srgbClr val="FFFDF7"/>
                 </a:solidFill>
-                <a:latin typeface="Karla"/>
+                <a:latin typeface="Calibri"/>
               </a:rPr>
               <a:t>3</a:t>
             </a:r>
@@ -8220,11 +8110,11 @@
               </a:spcAft>
             </a:pPr>
             <a:r>
-              <a:rPr sz="1300" b="1" i="0">
+              <a:rPr sz="1300" b="0" i="0">
                 <a:solidFill>
                   <a:srgbClr val="34322F"/>
                 </a:solidFill>
-                <a:latin typeface="Libre Caslon Display"/>
+                <a:latin typeface="Georgia"/>
               </a:rPr>
               <a:t>The story, in four or five sentences</a:t>
             </a:r>
@@ -8267,7 +8157,7 @@
                 <a:solidFill>
                   <a:srgbClr val="56524B"/>
                 </a:solidFill>
-                <a:latin typeface="Karla"/>
+                <a:latin typeface="Calibri"/>
               </a:rPr>
               <a:t>Use at least two cards, name each one, and put in one number from your sums.</a:t>
             </a:r>
@@ -8310,7 +8200,7 @@
                 <a:solidFill>
                   <a:srgbClr val="34322F"/>
                 </a:solidFill>
-                <a:latin typeface="Karla"/>
+                <a:latin typeface="Calibri"/>
               </a:rPr>
               <a:t>Your evidence sheet has everything you need. Write it for somebody who has not seen the cards.</a:t>
             </a:r>
@@ -8378,7 +8268,7 @@
                 <a:solidFill>
                   <a:srgbClr val="8C877D"/>
                 </a:solidFill>
-                <a:latin typeface="Karla"/>
+                <a:latin typeface="Calibri"/>
               </a:rPr>
               <a:t>The Pastoral Guide</a:t>
             </a:r>
@@ -8421,7 +8311,7 @@
                 <a:solidFill>
                   <a:srgbClr val="8C877D"/>
                 </a:solidFill>
-                <a:latin typeface="Karla"/>
+                <a:latin typeface="Calibri"/>
               </a:rPr>
               <a:t>14 / 19</a:t>
             </a:r>
@@ -8526,7 +8416,7 @@
                 <a:solidFill>
                   <a:srgbClr val="34322F"/>
                 </a:solidFill>
-                <a:latin typeface="Karla"/>
+                <a:latin typeface="Calibri"/>
               </a:rPr>
               <a:t>QUESTION THE HEADLINE  ·  LESSON 2 OF 5</a:t>
             </a:r>
@@ -8535,19 +8425,147 @@
       </p:sp>
       <p:sp>
         <p:nvSpPr>
-          <p:cNvPr id="4" name="Rounded Rectangle 3"/>
+          <p:cNvPr id="5" name="TextBox 4"/>
+          <p:cNvSpPr txBox="1"/>
+          <p:nvPr/>
+        </p:nvSpPr>
+        <p:spPr>
+          <a:xfrm>
+            <a:off x="685800" y="566928"/>
+            <a:ext cx="7772400" cy="434848"/>
+          </a:xfrm>
+          <a:prstGeom prst="rect">
+            <a:avLst/>
+          </a:prstGeom>
+          <a:noFill/>
+          <a:effectLst/>
+        </p:spPr>
+        <p:txBody>
+          <a:bodyPr wrap="square" anchor="t" lIns="0" rIns="0" tIns="0" bIns="0">
+            <a:spAutoFit/>
+          </a:bodyPr>
+          <a:lstStyle/>
+          <a:p>
+            <a:pPr algn="l">
+              <a:lnSpc>
+                <a:spcPct val="105000"/>
+              </a:lnSpc>
+              <a:spcAft>
+                <a:spcPts val="0"/>
+              </a:spcAft>
+            </a:pPr>
+            <a:r>
+              <a:rPr sz="2800" b="0" i="0">
+                <a:solidFill>
+                  <a:srgbClr val="262422"/>
+                </a:solidFill>
+                <a:latin typeface="Georgia"/>
+              </a:rPr>
+              <a:t>Check somebody else’s page</a:t>
+            </a:r>
+          </a:p>
+        </p:txBody>
+      </p:sp>
+      <p:sp>
+        <p:nvSpPr>
+          <p:cNvPr id="6" name="TextBox 5"/>
+          <p:cNvSpPr txBox="1"/>
+          <p:nvPr/>
+        </p:nvSpPr>
+        <p:spPr>
+          <a:xfrm>
+            <a:off x="685800" y="1152144"/>
+            <a:ext cx="7772400" cy="274320"/>
+          </a:xfrm>
+          <a:prstGeom prst="rect">
+            <a:avLst/>
+          </a:prstGeom>
+          <a:noFill/>
+          <a:effectLst/>
+        </p:spPr>
+        <p:txBody>
+          <a:bodyPr wrap="square" anchor="t" lIns="0" rIns="0" tIns="0" bIns="0">
+            <a:spAutoFit/>
+          </a:bodyPr>
+          <a:lstStyle/>
+          <a:p>
+            <a:pPr algn="l">
+              <a:lnSpc>
+                <a:spcPct val="125000"/>
+              </a:lnSpc>
+              <a:spcAft>
+                <a:spcPts val="0"/>
+              </a:spcAft>
+            </a:pPr>
+            <a:r>
+              <a:rPr sz="1300" b="0" i="0">
+                <a:solidFill>
+                  <a:srgbClr val="56524B"/>
+                </a:solidFill>
+                <a:latin typeface="Calibri"/>
+              </a:rPr>
+              <a:t>Swap front pages with somebody from another group. Tick each box it passes.</a:t>
+            </a:r>
+          </a:p>
+        </p:txBody>
+      </p:sp>
+      <p:sp>
+        <p:nvSpPr>
+          <p:cNvPr id="7" name="Rectangle 6"/>
           <p:cNvSpPr/>
           <p:nvPr/>
         </p:nvSpPr>
         <p:spPr>
           <a:xfrm>
-            <a:off x="7714534" y="246888"/>
-            <a:ext cx="743665" cy="237744"/>
-          </a:xfrm>
-          <a:prstGeom prst="roundRect">
-            <a:avLst>
-              <a:gd name="adj" fmla="val 50000"/>
-            </a:avLst>
+            <a:off x="685800" y="1591056"/>
+            <a:ext cx="7772400" cy="676656"/>
+          </a:xfrm>
+          <a:prstGeom prst="rect">
+            <a:avLst/>
+          </a:prstGeom>
+          <a:solidFill>
+            <a:srgbClr val="FFFDF7"/>
+          </a:solidFill>
+          <a:ln>
+            <a:noFill/>
+          </a:ln>
+          <a:effectLst/>
+        </p:spPr>
+        <p:style>
+          <a:lnRef idx="1">
+            <a:schemeClr val="accent1"/>
+          </a:lnRef>
+          <a:fillRef idx="3">
+            <a:schemeClr val="accent1"/>
+          </a:fillRef>
+          <a:effectRef idx="0">
+            <a:schemeClr val="accent1"/>
+          </a:effectRef>
+          <a:fontRef idx="minor">
+            <a:schemeClr val="lt1"/>
+          </a:fontRef>
+        </p:style>
+        <p:txBody>
+          <a:bodyPr rtlCol="0" anchor="ctr"/>
+          <a:lstStyle/>
+          <a:p>
+            <a:pPr algn="ctr"/>
+          </a:p>
+        </p:txBody>
+      </p:sp>
+      <p:sp>
+        <p:nvSpPr>
+          <p:cNvPr id="8" name="Oval 7"/>
+          <p:cNvSpPr/>
+          <p:nvPr/>
+        </p:nvSpPr>
+        <p:spPr>
+          <a:xfrm>
+            <a:off x="868680" y="1728216"/>
+            <a:ext cx="402336" cy="402336"/>
+          </a:xfrm>
+          <a:prstGeom prst="ellipse">
+            <a:avLst/>
           </a:prstGeom>
           <a:solidFill>
             <a:srgbClr val="34322F"/>
@@ -8572,32 +8590,66 @@
           </a:fontRef>
         </p:style>
         <p:txBody>
-          <a:bodyPr rtlCol="0" anchor="ctr" wrap="none" lIns="0" rIns="0" tIns="0" bIns="0"/>
+          <a:bodyPr rtlCol="0" anchor="ctr"/>
           <a:lstStyle/>
           <a:p>
             <a:pPr algn="ctr"/>
-            <a:r>
-              <a:rPr sz="950" b="1" spc="90">
+          </a:p>
+        </p:txBody>
+      </p:sp>
+      <p:sp>
+        <p:nvSpPr>
+          <p:cNvPr id="9" name="TextBox 8"/>
+          <p:cNvSpPr txBox="1"/>
+          <p:nvPr/>
+        </p:nvSpPr>
+        <p:spPr>
+          <a:xfrm>
+            <a:off x="868680" y="1824228"/>
+            <a:ext cx="402336" cy="219456"/>
+          </a:xfrm>
+          <a:prstGeom prst="rect">
+            <a:avLst/>
+          </a:prstGeom>
+          <a:noFill/>
+          <a:effectLst/>
+        </p:spPr>
+        <p:txBody>
+          <a:bodyPr wrap="square" anchor="t" lIns="0" rIns="0" tIns="0" bIns="0">
+            <a:spAutoFit/>
+          </a:bodyPr>
+          <a:lstStyle/>
+          <a:p>
+            <a:pPr algn="ctr">
+              <a:lnSpc>
+                <a:spcPct val="125000"/>
+              </a:lnSpc>
+              <a:spcAft>
+                <a:spcPts val="0"/>
+              </a:spcAft>
+            </a:pPr>
+            <a:r>
+              <a:rPr sz="1150" b="1" i="0">
                 <a:solidFill>
                   <a:srgbClr val="FFFDF7"/>
                 </a:solidFill>
-                <a:latin typeface="Karla"/>
-              </a:rPr>
-              <a:t>MARK</a:t>
-            </a:r>
-          </a:p>
-        </p:txBody>
-      </p:sp>
-      <p:sp>
-        <p:nvSpPr>
-          <p:cNvPr id="5" name="TextBox 4"/>
-          <p:cNvSpPr txBox="1"/>
-          <p:nvPr/>
-        </p:nvSpPr>
-        <p:spPr>
-          <a:xfrm>
-            <a:off x="685800" y="566928"/>
-            <a:ext cx="7772400" cy="434848"/>
+                <a:latin typeface="Calibri"/>
+              </a:rPr>
+              <a:t>1</a:t>
+            </a:r>
+          </a:p>
+        </p:txBody>
+      </p:sp>
+      <p:sp>
+        <p:nvSpPr>
+          <p:cNvPr id="10" name="TextBox 9"/>
+          <p:cNvSpPr txBox="1"/>
+          <p:nvPr/>
+        </p:nvSpPr>
+        <p:spPr>
+          <a:xfrm>
+            <a:off x="1417320" y="1691640"/>
+            <a:ext cx="6821424" cy="237744"/>
           </a:xfrm>
           <a:prstGeom prst="rect">
             <a:avLst/>
@@ -8613,34 +8665,34 @@
           <a:p>
             <a:pPr algn="l">
               <a:lnSpc>
-                <a:spcPct val="105000"/>
-              </a:lnSpc>
-              <a:spcAft>
-                <a:spcPts val="0"/>
-              </a:spcAft>
-            </a:pPr>
-            <a:r>
-              <a:rPr sz="2800" b="1" i="0">
-                <a:solidFill>
-                  <a:srgbClr val="262422"/>
-                </a:solidFill>
-                <a:latin typeface="Libre Caslon Display"/>
-              </a:rPr>
-              <a:t>Check somebody else’s page</a:t>
-            </a:r>
-          </a:p>
-        </p:txBody>
-      </p:sp>
-      <p:sp>
-        <p:nvSpPr>
-          <p:cNvPr id="6" name="TextBox 5"/>
-          <p:cNvSpPr txBox="1"/>
-          <p:nvPr/>
-        </p:nvSpPr>
-        <p:spPr>
-          <a:xfrm>
-            <a:off x="685800" y="1152144"/>
-            <a:ext cx="7772400" cy="274320"/>
+                <a:spcPct val="125000"/>
+              </a:lnSpc>
+              <a:spcAft>
+                <a:spcPts val="0"/>
+              </a:spcAft>
+            </a:pPr>
+            <a:r>
+              <a:rPr sz="1300" b="0" i="0">
+                <a:solidFill>
+                  <a:srgbClr val="34322F"/>
+                </a:solidFill>
+                <a:latin typeface="Georgia"/>
+              </a:rPr>
+              <a:t>Is the headline true to the evidence?</a:t>
+            </a:r>
+          </a:p>
+        </p:txBody>
+      </p:sp>
+      <p:sp>
+        <p:nvSpPr>
+          <p:cNvPr id="11" name="TextBox 10"/>
+          <p:cNvSpPr txBox="1"/>
+          <p:nvPr/>
+        </p:nvSpPr>
+        <p:spPr>
+          <a:xfrm>
+            <a:off x="1417320" y="1938528"/>
+            <a:ext cx="6821424" cy="256031"/>
           </a:xfrm>
           <a:prstGeom prst="rect">
             <a:avLst/>
@@ -8663,26 +8715,26 @@
               </a:spcAft>
             </a:pPr>
             <a:r>
-              <a:rPr sz="1300" b="0" i="0">
+              <a:rPr sz="1100" b="0" i="0">
                 <a:solidFill>
                   <a:srgbClr val="56524B"/>
                 </a:solidFill>
-                <a:latin typeface="Karla"/>
-              </a:rPr>
-              <a:t>Swap front pages with somebody from another group. Tick each box it passes.</a:t>
-            </a:r>
-          </a:p>
-        </p:txBody>
-      </p:sp>
-      <p:sp>
-        <p:nvSpPr>
-          <p:cNvPr id="7" name="Rectangle 6"/>
+                <a:latin typeface="Calibri"/>
+              </a:rPr>
+              <a:t>Not bigger, not smaller, than what the cards show.</a:t>
+            </a:r>
+          </a:p>
+        </p:txBody>
+      </p:sp>
+      <p:sp>
+        <p:nvSpPr>
+          <p:cNvPr id="12" name="Rectangle 11"/>
           <p:cNvSpPr/>
           <p:nvPr/>
         </p:nvSpPr>
         <p:spPr>
           <a:xfrm>
-            <a:off x="685800" y="1591056"/>
+            <a:off x="685800" y="2414016"/>
             <a:ext cx="7772400" cy="676656"/>
           </a:xfrm>
           <a:prstGeom prst="rect">
@@ -8720,13 +8772,13 @@
       </p:sp>
       <p:sp>
         <p:nvSpPr>
-          <p:cNvPr id="8" name="Oval 7"/>
+          <p:cNvPr id="13" name="Oval 12"/>
           <p:cNvSpPr/>
           <p:nvPr/>
         </p:nvSpPr>
         <p:spPr>
           <a:xfrm>
-            <a:off x="868680" y="1728216"/>
+            <a:off x="868680" y="2551176"/>
             <a:ext cx="402336" cy="402336"/>
           </a:xfrm>
           <a:prstGeom prst="ellipse">
@@ -8764,13 +8816,13 @@
       </p:sp>
       <p:sp>
         <p:nvSpPr>
-          <p:cNvPr id="9" name="TextBox 8"/>
-          <p:cNvSpPr txBox="1"/>
-          <p:nvPr/>
-        </p:nvSpPr>
-        <p:spPr>
-          <a:xfrm>
-            <a:off x="868680" y="1824228"/>
+          <p:cNvPr id="14" name="TextBox 13"/>
+          <p:cNvSpPr txBox="1"/>
+          <p:nvPr/>
+        </p:nvSpPr>
+        <p:spPr>
+          <a:xfrm>
+            <a:off x="868680" y="2647188"/>
             <a:ext cx="402336" cy="219456"/>
           </a:xfrm>
           <a:prstGeom prst="rect">
@@ -8798,22 +8850,22 @@
                 <a:solidFill>
                   <a:srgbClr val="FFFDF7"/>
                 </a:solidFill>
-                <a:latin typeface="Karla"/>
-              </a:rPr>
-              <a:t>1</a:t>
-            </a:r>
-          </a:p>
-        </p:txBody>
-      </p:sp>
-      <p:sp>
-        <p:nvSpPr>
-          <p:cNvPr id="10" name="TextBox 9"/>
-          <p:cNvSpPr txBox="1"/>
-          <p:nvPr/>
-        </p:nvSpPr>
-        <p:spPr>
-          <a:xfrm>
-            <a:off x="1417320" y="1691640"/>
+                <a:latin typeface="Calibri"/>
+              </a:rPr>
+              <a:t>2</a:t>
+            </a:r>
+          </a:p>
+        </p:txBody>
+      </p:sp>
+      <p:sp>
+        <p:nvSpPr>
+          <p:cNvPr id="15" name="TextBox 14"/>
+          <p:cNvSpPr txBox="1"/>
+          <p:nvPr/>
+        </p:nvSpPr>
+        <p:spPr>
+          <a:xfrm>
+            <a:off x="1417320" y="2514600"/>
             <a:ext cx="6821424" cy="237744"/>
           </a:xfrm>
           <a:prstGeom prst="rect">
@@ -8837,26 +8889,26 @@
               </a:spcAft>
             </a:pPr>
             <a:r>
-              <a:rPr sz="1300" b="1" i="0">
+              <a:rPr sz="1300" b="0" i="0">
                 <a:solidFill>
                   <a:srgbClr val="34322F"/>
                 </a:solidFill>
-                <a:latin typeface="Libre Caslon Display"/>
-              </a:rPr>
-              <a:t>Is the headline true to the evidence?</a:t>
-            </a:r>
-          </a:p>
-        </p:txBody>
-      </p:sp>
-      <p:sp>
-        <p:nvSpPr>
-          <p:cNvPr id="11" name="TextBox 10"/>
-          <p:cNvSpPr txBox="1"/>
-          <p:nvPr/>
-        </p:nvSpPr>
-        <p:spPr>
-          <a:xfrm>
-            <a:off x="1417320" y="1938528"/>
+                <a:latin typeface="Georgia"/>
+              </a:rPr>
+              <a:t>Does it say where the evidence came from?</a:t>
+            </a:r>
+          </a:p>
+        </p:txBody>
+      </p:sp>
+      <p:sp>
+        <p:nvSpPr>
+          <p:cNvPr id="16" name="TextBox 15"/>
+          <p:cNvSpPr txBox="1"/>
+          <p:nvPr/>
+        </p:nvSpPr>
+        <p:spPr>
+          <a:xfrm>
+            <a:off x="1417320" y="2761488"/>
             <a:ext cx="6821424" cy="256031"/>
           </a:xfrm>
           <a:prstGeom prst="rect">
@@ -8884,22 +8936,22 @@
                 <a:solidFill>
                   <a:srgbClr val="56524B"/>
                 </a:solidFill>
-                <a:latin typeface="Karla"/>
-              </a:rPr>
-              <a:t>Not bigger, not smaller, than what the cards show.</a:t>
-            </a:r>
-          </a:p>
-        </p:txBody>
-      </p:sp>
-      <p:sp>
-        <p:nvSpPr>
-          <p:cNvPr id="12" name="Rectangle 11"/>
+                <a:latin typeface="Calibri"/>
+              </a:rPr>
+              <a:t>A study, a document, a person with a name.</a:t>
+            </a:r>
+          </a:p>
+        </p:txBody>
+      </p:sp>
+      <p:sp>
+        <p:nvSpPr>
+          <p:cNvPr id="17" name="Rectangle 16"/>
           <p:cNvSpPr/>
           <p:nvPr/>
         </p:nvSpPr>
         <p:spPr>
           <a:xfrm>
-            <a:off x="685800" y="2414016"/>
+            <a:off x="685800" y="3236976"/>
             <a:ext cx="7772400" cy="676656"/>
           </a:xfrm>
           <a:prstGeom prst="rect">
@@ -8937,13 +8989,13 @@
       </p:sp>
       <p:sp>
         <p:nvSpPr>
-          <p:cNvPr id="13" name="Oval 12"/>
+          <p:cNvPr id="18" name="Oval 17"/>
           <p:cNvSpPr/>
           <p:nvPr/>
         </p:nvSpPr>
         <p:spPr>
           <a:xfrm>
-            <a:off x="868680" y="2551176"/>
+            <a:off x="868680" y="3374136"/>
             <a:ext cx="402336" cy="402336"/>
           </a:xfrm>
           <a:prstGeom prst="ellipse">
@@ -8981,223 +9033,6 @@
       </p:sp>
       <p:sp>
         <p:nvSpPr>
-          <p:cNvPr id="14" name="TextBox 13"/>
-          <p:cNvSpPr txBox="1"/>
-          <p:nvPr/>
-        </p:nvSpPr>
-        <p:spPr>
-          <a:xfrm>
-            <a:off x="868680" y="2647188"/>
-            <a:ext cx="402336" cy="219456"/>
-          </a:xfrm>
-          <a:prstGeom prst="rect">
-            <a:avLst/>
-          </a:prstGeom>
-          <a:noFill/>
-          <a:effectLst/>
-        </p:spPr>
-        <p:txBody>
-          <a:bodyPr wrap="square" anchor="t" lIns="0" rIns="0" tIns="0" bIns="0">
-            <a:spAutoFit/>
-          </a:bodyPr>
-          <a:lstStyle/>
-          <a:p>
-            <a:pPr algn="ctr">
-              <a:lnSpc>
-                <a:spcPct val="125000"/>
-              </a:lnSpc>
-              <a:spcAft>
-                <a:spcPts val="0"/>
-              </a:spcAft>
-            </a:pPr>
-            <a:r>
-              <a:rPr sz="1150" b="1" i="0">
-                <a:solidFill>
-                  <a:srgbClr val="FFFDF7"/>
-                </a:solidFill>
-                <a:latin typeface="Karla"/>
-              </a:rPr>
-              <a:t>2</a:t>
-            </a:r>
-          </a:p>
-        </p:txBody>
-      </p:sp>
-      <p:sp>
-        <p:nvSpPr>
-          <p:cNvPr id="15" name="TextBox 14"/>
-          <p:cNvSpPr txBox="1"/>
-          <p:nvPr/>
-        </p:nvSpPr>
-        <p:spPr>
-          <a:xfrm>
-            <a:off x="1417320" y="2514600"/>
-            <a:ext cx="6821424" cy="237744"/>
-          </a:xfrm>
-          <a:prstGeom prst="rect">
-            <a:avLst/>
-          </a:prstGeom>
-          <a:noFill/>
-          <a:effectLst/>
-        </p:spPr>
-        <p:txBody>
-          <a:bodyPr wrap="square" anchor="t" lIns="0" rIns="0" tIns="0" bIns="0">
-            <a:spAutoFit/>
-          </a:bodyPr>
-          <a:lstStyle/>
-          <a:p>
-            <a:pPr algn="l">
-              <a:lnSpc>
-                <a:spcPct val="125000"/>
-              </a:lnSpc>
-              <a:spcAft>
-                <a:spcPts val="0"/>
-              </a:spcAft>
-            </a:pPr>
-            <a:r>
-              <a:rPr sz="1300" b="1" i="0">
-                <a:solidFill>
-                  <a:srgbClr val="34322F"/>
-                </a:solidFill>
-                <a:latin typeface="Libre Caslon Display"/>
-              </a:rPr>
-              <a:t>Does it say where the evidence came from?</a:t>
-            </a:r>
-          </a:p>
-        </p:txBody>
-      </p:sp>
-      <p:sp>
-        <p:nvSpPr>
-          <p:cNvPr id="16" name="TextBox 15"/>
-          <p:cNvSpPr txBox="1"/>
-          <p:nvPr/>
-        </p:nvSpPr>
-        <p:spPr>
-          <a:xfrm>
-            <a:off x="1417320" y="2761488"/>
-            <a:ext cx="6821424" cy="256031"/>
-          </a:xfrm>
-          <a:prstGeom prst="rect">
-            <a:avLst/>
-          </a:prstGeom>
-          <a:noFill/>
-          <a:effectLst/>
-        </p:spPr>
-        <p:txBody>
-          <a:bodyPr wrap="square" anchor="t" lIns="0" rIns="0" tIns="0" bIns="0">
-            <a:spAutoFit/>
-          </a:bodyPr>
-          <a:lstStyle/>
-          <a:p>
-            <a:pPr algn="l">
-              <a:lnSpc>
-                <a:spcPct val="125000"/>
-              </a:lnSpc>
-              <a:spcAft>
-                <a:spcPts val="0"/>
-              </a:spcAft>
-            </a:pPr>
-            <a:r>
-              <a:rPr sz="1100" b="0" i="0">
-                <a:solidFill>
-                  <a:srgbClr val="56524B"/>
-                </a:solidFill>
-                <a:latin typeface="Karla"/>
-              </a:rPr>
-              <a:t>A study, a document, a person with a name.</a:t>
-            </a:r>
-          </a:p>
-        </p:txBody>
-      </p:sp>
-      <p:sp>
-        <p:nvSpPr>
-          <p:cNvPr id="17" name="Rectangle 16"/>
-          <p:cNvSpPr/>
-          <p:nvPr/>
-        </p:nvSpPr>
-        <p:spPr>
-          <a:xfrm>
-            <a:off x="685800" y="3236976"/>
-            <a:ext cx="7772400" cy="676656"/>
-          </a:xfrm>
-          <a:prstGeom prst="rect">
-            <a:avLst/>
-          </a:prstGeom>
-          <a:solidFill>
-            <a:srgbClr val="FFFDF7"/>
-          </a:solidFill>
-          <a:ln>
-            <a:noFill/>
-          </a:ln>
-          <a:effectLst/>
-        </p:spPr>
-        <p:style>
-          <a:lnRef idx="1">
-            <a:schemeClr val="accent1"/>
-          </a:lnRef>
-          <a:fillRef idx="3">
-            <a:schemeClr val="accent1"/>
-          </a:fillRef>
-          <a:effectRef idx="0">
-            <a:schemeClr val="accent1"/>
-          </a:effectRef>
-          <a:fontRef idx="minor">
-            <a:schemeClr val="lt1"/>
-          </a:fontRef>
-        </p:style>
-        <p:txBody>
-          <a:bodyPr rtlCol="0" anchor="ctr"/>
-          <a:lstStyle/>
-          <a:p>
-            <a:pPr algn="ctr"/>
-          </a:p>
-        </p:txBody>
-      </p:sp>
-      <p:sp>
-        <p:nvSpPr>
-          <p:cNvPr id="18" name="Oval 17"/>
-          <p:cNvSpPr/>
-          <p:nvPr/>
-        </p:nvSpPr>
-        <p:spPr>
-          <a:xfrm>
-            <a:off x="868680" y="3374136"/>
-            <a:ext cx="402336" cy="402336"/>
-          </a:xfrm>
-          <a:prstGeom prst="ellipse">
-            <a:avLst/>
-          </a:prstGeom>
-          <a:solidFill>
-            <a:srgbClr val="34322F"/>
-          </a:solidFill>
-          <a:ln>
-            <a:noFill/>
-          </a:ln>
-          <a:effectLst/>
-        </p:spPr>
-        <p:style>
-          <a:lnRef idx="1">
-            <a:schemeClr val="accent1"/>
-          </a:lnRef>
-          <a:fillRef idx="3">
-            <a:schemeClr val="accent1"/>
-          </a:fillRef>
-          <a:effectRef idx="0">
-            <a:schemeClr val="accent1"/>
-          </a:effectRef>
-          <a:fontRef idx="minor">
-            <a:schemeClr val="lt1"/>
-          </a:fontRef>
-        </p:style>
-        <p:txBody>
-          <a:bodyPr rtlCol="0" anchor="ctr"/>
-          <a:lstStyle/>
-          <a:p>
-            <a:pPr algn="ctr"/>
-          </a:p>
-        </p:txBody>
-      </p:sp>
-      <p:sp>
-        <p:nvSpPr>
           <p:cNvPr id="19" name="TextBox 18"/>
           <p:cNvSpPr txBox="1"/>
           <p:nvPr/>
@@ -9232,7 +9067,7 @@
                 <a:solidFill>
                   <a:srgbClr val="FFFDF7"/>
                 </a:solidFill>
-                <a:latin typeface="Karla"/>
+                <a:latin typeface="Calibri"/>
               </a:rPr>
               <a:t>3</a:t>
             </a:r>
@@ -9271,11 +9106,11 @@
               </a:spcAft>
             </a:pPr>
             <a:r>
-              <a:rPr sz="1300" b="1" i="0">
+              <a:rPr sz="1300" b="0" i="0">
                 <a:solidFill>
                   <a:srgbClr val="34322F"/>
                 </a:solidFill>
-                <a:latin typeface="Libre Caslon Display"/>
+                <a:latin typeface="Georgia"/>
               </a:rPr>
               <a:t>Would it survive the five questions?</a:t>
             </a:r>
@@ -9318,7 +9153,7 @@
                 <a:solidFill>
                   <a:srgbClr val="56524B"/>
                 </a:solidFill>
-                <a:latin typeface="Karla"/>
+                <a:latin typeface="Calibri"/>
               </a:rPr>
               <a:t>Try one or two of them on it.</a:t>
             </a:r>
@@ -9361,7 +9196,7 @@
                 <a:solidFill>
                   <a:srgbClr val="34322F"/>
                 </a:solidFill>
-                <a:latin typeface="Karla"/>
+                <a:latin typeface="Calibri"/>
               </a:rPr>
               <a:t>Write one change that would make it better, then hand it back.</a:t>
             </a:r>
@@ -9429,7 +9264,7 @@
                 <a:solidFill>
                   <a:srgbClr val="8C877D"/>
                 </a:solidFill>
-                <a:latin typeface="Karla"/>
+                <a:latin typeface="Calibri"/>
               </a:rPr>
               <a:t>The Pastoral Guide</a:t>
             </a:r>
@@ -9472,7 +9307,7 @@
                 <a:solidFill>
                   <a:srgbClr val="8C877D"/>
                 </a:solidFill>
-                <a:latin typeface="Karla"/>
+                <a:latin typeface="Calibri"/>
               </a:rPr>
               <a:t>15 / 19</a:t>
             </a:r>
@@ -9577,7 +9412,7 @@
                 <a:solidFill>
                   <a:srgbClr val="34322F"/>
                 </a:solidFill>
-                <a:latin typeface="Karla"/>
+                <a:latin typeface="Calibri"/>
               </a:rPr>
               <a:t>QUESTION THE HEADLINE  ·  LESSON 2 OF 5</a:t>
             </a:r>
@@ -9616,11 +9451,11 @@
               </a:spcAft>
             </a:pPr>
             <a:r>
-              <a:rPr sz="2800" b="1" i="0">
+              <a:rPr sz="2800" b="0" i="0">
                 <a:solidFill>
                   <a:srgbClr val="262422"/>
                 </a:solidFill>
-                <a:latin typeface="Libre Caslon Display"/>
+                <a:latin typeface="Georgia"/>
               </a:rPr>
               <a:t>What really happened</a:t>
             </a:r>
@@ -9721,7 +9556,7 @@
                 <a:solidFill>
                   <a:srgbClr val="34322F"/>
                 </a:solidFill>
-                <a:latin typeface="Karla"/>
+                <a:latin typeface="Calibri"/>
               </a:rPr>
               <a:t>BUSTED</a:t>
             </a:r>
@@ -9760,11 +9595,11 @@
               </a:spcAft>
             </a:pPr>
             <a:r>
-              <a:rPr sz="1500" b="1" i="0">
+              <a:rPr sz="1500" b="0" i="0">
                 <a:solidFill>
                   <a:srgbClr val="34322F"/>
                 </a:solidFill>
-                <a:latin typeface="Libre Caslon Display"/>
+                <a:latin typeface="Georgia"/>
               </a:rPr>
               <a:t>1958</a:t>
             </a:r>
@@ -9851,7 +9686,7 @@
                 <a:solidFill>
                   <a:srgbClr val="262422"/>
                 </a:solidFill>
-                <a:latin typeface="Karla"/>
+                <a:latin typeface="Calibri"/>
               </a:rPr>
               <a:t>Thalidomide goes on sale in the UK as Distaval.</a:t>
             </a:r>
@@ -9890,11 +9725,11 @@
               </a:spcAft>
             </a:pPr>
             <a:r>
-              <a:rPr sz="1500" b="1" i="0">
+              <a:rPr sz="1500" b="0" i="0">
                 <a:solidFill>
                   <a:srgbClr val="34322F"/>
                 </a:solidFill>
-                <a:latin typeface="Libre Caslon Display"/>
+                <a:latin typeface="Georgia"/>
               </a:rPr>
               <a:t>1960</a:t>
             </a:r>
@@ -9981,7 +9816,7 @@
                 <a:solidFill>
                   <a:srgbClr val="262422"/>
                 </a:solidFill>
-                <a:latin typeface="Karla"/>
+                <a:latin typeface="Calibri"/>
               </a:rPr>
               <a:t>Frances Kelsey is asked to approve it in the US, and says no.</a:t>
             </a:r>
@@ -10020,11 +9855,11 @@
               </a:spcAft>
             </a:pPr>
             <a:r>
-              <a:rPr sz="1500" b="1" i="0">
+              <a:rPr sz="1500" b="0" i="0">
                 <a:solidFill>
                   <a:srgbClr val="34322F"/>
                 </a:solidFill>
-                <a:latin typeface="Libre Caslon Display"/>
+                <a:latin typeface="Georgia"/>
               </a:rPr>
               <a:t>1961</a:t>
             </a:r>
@@ -10111,7 +9946,7 @@
                 <a:solidFill>
                   <a:srgbClr val="262422"/>
                 </a:solidFill>
-                <a:latin typeface="Karla"/>
+                <a:latin typeface="Calibri"/>
               </a:rPr>
               <a:t>Doctors link it to birth defects and it is withdrawn.</a:t>
             </a:r>
@@ -10150,11 +9985,11 @@
               </a:spcAft>
             </a:pPr>
             <a:r>
-              <a:rPr sz="1500" b="1" i="0">
+              <a:rPr sz="1500" b="0" i="0">
                 <a:solidFill>
                   <a:srgbClr val="34322F"/>
                 </a:solidFill>
-                <a:latin typeface="Libre Caslon Display"/>
+                <a:latin typeface="Georgia"/>
               </a:rPr>
               <a:t>1964</a:t>
             </a:r>
@@ -10241,7 +10076,7 @@
                 <a:solidFill>
                   <a:srgbClr val="262422"/>
                 </a:solidFill>
-                <a:latin typeface="Karla"/>
+                <a:latin typeface="Calibri"/>
               </a:rPr>
               <a:t>The UK starts the Yellow Card scheme, which people still use to report side effects.</a:t>
             </a:r>
@@ -10328,7 +10163,7 @@
                 <a:solidFill>
                   <a:srgbClr val="D7D2C8"/>
                 </a:solidFill>
-                <a:latin typeface="Karla"/>
+                <a:latin typeface="Calibri"/>
               </a:rPr>
               <a:t>THE QUESTION THAT WOULD HAVE CAUGHT IT</a:t>
             </a:r>
@@ -10367,11 +10202,11 @@
               </a:spcAft>
             </a:pPr>
             <a:r>
-              <a:rPr sz="1800" b="1" i="0">
+              <a:rPr sz="1800" b="0" i="0">
                 <a:solidFill>
                   <a:srgbClr val="FFFDF7"/>
                 </a:solidFill>
-                <a:latin typeface="Libre Caslon Display"/>
+                <a:latin typeface="Georgia"/>
               </a:rPr>
               <a:t>Has it been tested, and by whom?</a:t>
             </a:r>
@@ -10439,7 +10274,7 @@
                 <a:solidFill>
                   <a:srgbClr val="8C877D"/>
                 </a:solidFill>
-                <a:latin typeface="Karla"/>
+                <a:latin typeface="Calibri"/>
               </a:rPr>
               <a:t>The Pastoral Guide</a:t>
             </a:r>
@@ -10482,7 +10317,7 @@
                 <a:solidFill>
                   <a:srgbClr val="8C877D"/>
                 </a:solidFill>
-                <a:latin typeface="Karla"/>
+                <a:latin typeface="Calibri"/>
               </a:rPr>
               <a:t>16 / 19</a:t>
             </a:r>
@@ -10587,64 +10422,9 @@
                 <a:solidFill>
                   <a:srgbClr val="34322F"/>
                 </a:solidFill>
-                <a:latin typeface="Karla"/>
+                <a:latin typeface="Calibri"/>
               </a:rPr>
               <a:t>QUESTION THE HEADLINE  ·  LESSON 2 OF 5</a:t>
-            </a:r>
-          </a:p>
-        </p:txBody>
-      </p:sp>
-      <p:sp>
-        <p:nvSpPr>
-          <p:cNvPr id="4" name="Rounded Rectangle 3"/>
-          <p:cNvSpPr/>
-          <p:nvPr/>
-        </p:nvSpPr>
-        <p:spPr>
-          <a:xfrm>
-            <a:off x="7640472" y="246888"/>
-            <a:ext cx="817727" cy="237744"/>
-          </a:xfrm>
-          <a:prstGeom prst="roundRect">
-            <a:avLst>
-              <a:gd name="adj" fmla="val 50000"/>
-            </a:avLst>
-          </a:prstGeom>
-          <a:solidFill>
-            <a:srgbClr val="34322F"/>
-          </a:solidFill>
-          <a:ln>
-            <a:noFill/>
-          </a:ln>
-          <a:effectLst/>
-        </p:spPr>
-        <p:style>
-          <a:lnRef idx="1">
-            <a:schemeClr val="accent1"/>
-          </a:lnRef>
-          <a:fillRef idx="3">
-            <a:schemeClr val="accent1"/>
-          </a:fillRef>
-          <a:effectRef idx="0">
-            <a:schemeClr val="accent1"/>
-          </a:effectRef>
-          <a:fontRef idx="minor">
-            <a:schemeClr val="lt1"/>
-          </a:fontRef>
-        </p:style>
-        <p:txBody>
-          <a:bodyPr rtlCol="0" anchor="ctr" wrap="none" lIns="0" rIns="0" tIns="0" bIns="0"/>
-          <a:lstStyle/>
-          <a:p>
-            <a:pPr algn="ctr"/>
-            <a:r>
-              <a:rPr sz="950" b="1" spc="90">
-                <a:solidFill>
-                  <a:srgbClr val="FFFDF7"/>
-                </a:solidFill>
-                <a:latin typeface="Karla"/>
-              </a:rPr>
-              <a:t>ARGUE</a:t>
             </a:r>
           </a:p>
         </p:txBody>
@@ -10685,7 +10465,7 @@
                 <a:solidFill>
                   <a:srgbClr val="56524B"/>
                 </a:solidFill>
-                <a:latin typeface="Karla"/>
+                <a:latin typeface="Calibri"/>
               </a:rPr>
               <a:t>NO RIGHT ANSWER</a:t>
             </a:r>
@@ -10818,11 +10598,11 @@
               </a:spcAft>
             </a:pPr>
             <a:r>
-              <a:rPr sz="2200" b="1" i="0">
+              <a:rPr sz="2200" b="0" i="0">
                 <a:solidFill>
                   <a:srgbClr val="262422"/>
                 </a:solidFill>
-                <a:latin typeface="Libre Caslon Display"/>
+                <a:latin typeface="Georgia"/>
               </a:rPr>
               <a:t>Frances Kelsey was pushed again and again to say yes. Why is it hard to keep saying no when everybody else has said yes?</a:t>
             </a:r>
@@ -10865,7 +10645,7 @@
                 <a:solidFill>
                   <a:srgbClr val="34322F"/>
                 </a:solidFill>
-                <a:latin typeface="Karla"/>
+                <a:latin typeface="Calibri"/>
               </a:rPr>
               <a:t>Two minutes with the person next to you, then we hear from a few.</a:t>
             </a:r>
@@ -10933,7 +10713,7 @@
                 <a:solidFill>
                   <a:srgbClr val="8C877D"/>
                 </a:solidFill>
-                <a:latin typeface="Karla"/>
+                <a:latin typeface="Calibri"/>
               </a:rPr>
               <a:t>The Pastoral Guide</a:t>
             </a:r>
@@ -10976,7 +10756,7 @@
                 <a:solidFill>
                   <a:srgbClr val="8C877D"/>
                 </a:solidFill>
-                <a:latin typeface="Karla"/>
+                <a:latin typeface="Calibri"/>
               </a:rPr>
               <a:t>17 / 19</a:t>
             </a:r>
@@ -11081,7 +10861,7 @@
                 <a:solidFill>
                   <a:srgbClr val="34322F"/>
                 </a:solidFill>
-                <a:latin typeface="Karla"/>
+                <a:latin typeface="Calibri"/>
               </a:rPr>
               <a:t>QUESTION THE HEADLINE  ·  LESSON 2 OF 5</a:t>
             </a:r>
@@ -11090,19 +10870,104 @@
       </p:sp>
       <p:sp>
         <p:nvSpPr>
-          <p:cNvPr id="4" name="Rounded Rectangle 3"/>
+          <p:cNvPr id="5" name="TextBox 4"/>
+          <p:cNvSpPr txBox="1"/>
+          <p:nvPr/>
+        </p:nvSpPr>
+        <p:spPr>
+          <a:xfrm>
+            <a:off x="685800" y="566928"/>
+            <a:ext cx="7772400" cy="434848"/>
+          </a:xfrm>
+          <a:prstGeom prst="rect">
+            <a:avLst/>
+          </a:prstGeom>
+          <a:noFill/>
+          <a:effectLst/>
+        </p:spPr>
+        <p:txBody>
+          <a:bodyPr wrap="square" anchor="t" lIns="0" rIns="0" tIns="0" bIns="0">
+            <a:spAutoFit/>
+          </a:bodyPr>
+          <a:lstStyle/>
+          <a:p>
+            <a:pPr algn="l">
+              <a:lnSpc>
+                <a:spcPct val="105000"/>
+              </a:lnSpc>
+              <a:spcAft>
+                <a:spcPts val="0"/>
+              </a:spcAft>
+            </a:pPr>
+            <a:r>
+              <a:rPr sz="2800" b="0" i="0">
+                <a:solidFill>
+                  <a:srgbClr val="262422"/>
+                </a:solidFill>
+                <a:latin typeface="Georgia"/>
+              </a:rPr>
+              <a:t>Two questions, just for you</a:t>
+            </a:r>
+          </a:p>
+        </p:txBody>
+      </p:sp>
+      <p:sp>
+        <p:nvSpPr>
+          <p:cNvPr id="6" name="Rectangle 5"/>
           <p:cNvSpPr/>
           <p:nvPr/>
         </p:nvSpPr>
         <p:spPr>
           <a:xfrm>
-            <a:off x="7486248" y="246888"/>
-            <a:ext cx="971951" cy="237744"/>
-          </a:xfrm>
-          <a:prstGeom prst="roundRect">
-            <a:avLst>
-              <a:gd name="adj" fmla="val 50000"/>
-            </a:avLst>
+            <a:off x="685800" y="1371600"/>
+            <a:ext cx="7772400" cy="946403"/>
+          </a:xfrm>
+          <a:prstGeom prst="rect">
+            <a:avLst/>
+          </a:prstGeom>
+          <a:solidFill>
+            <a:srgbClr val="FFFFFF"/>
+          </a:solidFill>
+          <a:ln>
+            <a:noFill/>
+          </a:ln>
+          <a:effectLst/>
+        </p:spPr>
+        <p:style>
+          <a:lnRef idx="1">
+            <a:schemeClr val="accent1"/>
+          </a:lnRef>
+          <a:fillRef idx="3">
+            <a:schemeClr val="accent1"/>
+          </a:fillRef>
+          <a:effectRef idx="0">
+            <a:schemeClr val="accent1"/>
+          </a:effectRef>
+          <a:fontRef idx="minor">
+            <a:schemeClr val="lt1"/>
+          </a:fontRef>
+        </p:style>
+        <p:txBody>
+          <a:bodyPr rtlCol="0" anchor="ctr"/>
+          <a:lstStyle/>
+          <a:p>
+            <a:pPr algn="ctr"/>
+          </a:p>
+        </p:txBody>
+      </p:sp>
+      <p:sp>
+        <p:nvSpPr>
+          <p:cNvPr id="7" name="Rectangle 6"/>
+          <p:cNvSpPr/>
+          <p:nvPr/>
+        </p:nvSpPr>
+        <p:spPr>
+          <a:xfrm>
+            <a:off x="685800" y="1371600"/>
+            <a:ext cx="45720" cy="946403"/>
+          </a:xfrm>
+          <a:prstGeom prst="rect">
+            <a:avLst/>
           </a:prstGeom>
           <a:solidFill>
             <a:srgbClr val="34322F"/>
@@ -11127,32 +10992,110 @@
           </a:fontRef>
         </p:style>
         <p:txBody>
-          <a:bodyPr rtlCol="0" anchor="ctr" wrap="none" lIns="0" rIns="0" tIns="0" bIns="0"/>
+          <a:bodyPr rtlCol="0" anchor="ctr"/>
           <a:lstStyle/>
           <a:p>
             <a:pPr algn="ctr"/>
-            <a:r>
-              <a:rPr sz="950" b="1" spc="90">
+          </a:p>
+        </p:txBody>
+      </p:sp>
+      <p:sp>
+        <p:nvSpPr>
+          <p:cNvPr id="8" name="Oval 7"/>
+          <p:cNvSpPr/>
+          <p:nvPr/>
+        </p:nvSpPr>
+        <p:spPr>
+          <a:xfrm>
+            <a:off x="896112" y="1643634"/>
+            <a:ext cx="402336" cy="402336"/>
+          </a:xfrm>
+          <a:prstGeom prst="ellipse">
+            <a:avLst/>
+          </a:prstGeom>
+          <a:solidFill>
+            <a:srgbClr val="34322F"/>
+          </a:solidFill>
+          <a:ln>
+            <a:noFill/>
+          </a:ln>
+          <a:effectLst/>
+        </p:spPr>
+        <p:style>
+          <a:lnRef idx="1">
+            <a:schemeClr val="accent1"/>
+          </a:lnRef>
+          <a:fillRef idx="3">
+            <a:schemeClr val="accent1"/>
+          </a:fillRef>
+          <a:effectRef idx="0">
+            <a:schemeClr val="accent1"/>
+          </a:effectRef>
+          <a:fontRef idx="minor">
+            <a:schemeClr val="lt1"/>
+          </a:fontRef>
+        </p:style>
+        <p:txBody>
+          <a:bodyPr rtlCol="0" anchor="ctr"/>
+          <a:lstStyle/>
+          <a:p>
+            <a:pPr algn="ctr"/>
+          </a:p>
+        </p:txBody>
+      </p:sp>
+      <p:sp>
+        <p:nvSpPr>
+          <p:cNvPr id="9" name="TextBox 8"/>
+          <p:cNvSpPr txBox="1"/>
+          <p:nvPr/>
+        </p:nvSpPr>
+        <p:spPr>
+          <a:xfrm>
+            <a:off x="896112" y="1735074"/>
+            <a:ext cx="402336" cy="219456"/>
+          </a:xfrm>
+          <a:prstGeom prst="rect">
+            <a:avLst/>
+          </a:prstGeom>
+          <a:noFill/>
+          <a:effectLst/>
+        </p:spPr>
+        <p:txBody>
+          <a:bodyPr wrap="square" anchor="t" lIns="0" rIns="0" tIns="0" bIns="0">
+            <a:spAutoFit/>
+          </a:bodyPr>
+          <a:lstStyle/>
+          <a:p>
+            <a:pPr algn="ctr">
+              <a:lnSpc>
+                <a:spcPct val="125000"/>
+              </a:lnSpc>
+              <a:spcAft>
+                <a:spcPts val="0"/>
+              </a:spcAft>
+            </a:pPr>
+            <a:r>
+              <a:rPr sz="1200" b="1" i="0">
                 <a:solidFill>
                   <a:srgbClr val="FFFDF7"/>
                 </a:solidFill>
-                <a:latin typeface="Karla"/>
-              </a:rPr>
-              <a:t>FOR YOU</a:t>
-            </a:r>
-          </a:p>
-        </p:txBody>
-      </p:sp>
-      <p:sp>
-        <p:nvSpPr>
-          <p:cNvPr id="5" name="TextBox 4"/>
-          <p:cNvSpPr txBox="1"/>
-          <p:nvPr/>
-        </p:nvSpPr>
-        <p:spPr>
-          <a:xfrm>
-            <a:off x="685800" y="566928"/>
-            <a:ext cx="7772400" cy="434848"/>
+                <a:latin typeface="Calibri"/>
+              </a:rPr>
+              <a:t>1</a:t>
+            </a:r>
+          </a:p>
+        </p:txBody>
+      </p:sp>
+      <p:sp>
+        <p:nvSpPr>
+          <p:cNvPr id="10" name="TextBox 9"/>
+          <p:cNvSpPr txBox="1"/>
+          <p:nvPr/>
+        </p:nvSpPr>
+        <p:spPr>
+          <a:xfrm>
+            <a:off x="1554480" y="1572768"/>
+            <a:ext cx="6675120" cy="544068"/>
           </a:xfrm>
           <a:prstGeom prst="rect">
             <a:avLst/>
@@ -11168,33 +11111,33 @@
           <a:p>
             <a:pPr algn="l">
               <a:lnSpc>
-                <a:spcPct val="105000"/>
-              </a:lnSpc>
-              <a:spcAft>
-                <a:spcPts val="0"/>
-              </a:spcAft>
-            </a:pPr>
-            <a:r>
-              <a:rPr sz="2800" b="1" i="0">
+                <a:spcPct val="115000"/>
+              </a:lnSpc>
+              <a:spcAft>
+                <a:spcPts val="0"/>
+              </a:spcAft>
+            </a:pPr>
+            <a:r>
+              <a:rPr sz="1700" b="0" i="0">
                 <a:solidFill>
                   <a:srgbClr val="262422"/>
                 </a:solidFill>
-                <a:latin typeface="Libre Caslon Display"/>
-              </a:rPr>
-              <a:t>Two questions, just for you</a:t>
-            </a:r>
-          </a:p>
-        </p:txBody>
-      </p:sp>
-      <p:sp>
-        <p:nvSpPr>
-          <p:cNvPr id="6" name="Rectangle 5"/>
+                <a:latin typeface="Georgia"/>
+              </a:rPr>
+              <a:t>Where did you move on the line, and which card moved you?</a:t>
+            </a:r>
+          </a:p>
+        </p:txBody>
+      </p:sp>
+      <p:sp>
+        <p:nvSpPr>
+          <p:cNvPr id="11" name="Rectangle 10"/>
           <p:cNvSpPr/>
           <p:nvPr/>
         </p:nvSpPr>
         <p:spPr>
           <a:xfrm>
-            <a:off x="685800" y="1371600"/>
+            <a:off x="685800" y="2537460"/>
             <a:ext cx="7772400" cy="946403"/>
           </a:xfrm>
           <a:prstGeom prst="rect">
@@ -11232,13 +11175,13 @@
       </p:sp>
       <p:sp>
         <p:nvSpPr>
-          <p:cNvPr id="7" name="Rectangle 6"/>
+          <p:cNvPr id="12" name="Rectangle 11"/>
           <p:cNvSpPr/>
           <p:nvPr/>
         </p:nvSpPr>
         <p:spPr>
           <a:xfrm>
-            <a:off x="685800" y="1371600"/>
+            <a:off x="685800" y="2537460"/>
             <a:ext cx="45720" cy="946403"/>
           </a:xfrm>
           <a:prstGeom prst="rect">
@@ -11276,13 +11219,13 @@
       </p:sp>
       <p:sp>
         <p:nvSpPr>
-          <p:cNvPr id="8" name="Oval 7"/>
+          <p:cNvPr id="13" name="Oval 12"/>
           <p:cNvSpPr/>
           <p:nvPr/>
         </p:nvSpPr>
         <p:spPr>
           <a:xfrm>
-            <a:off x="896112" y="1643634"/>
+            <a:off x="896112" y="2809494"/>
             <a:ext cx="402336" cy="402336"/>
           </a:xfrm>
           <a:prstGeom prst="ellipse">
@@ -11320,224 +11263,6 @@
       </p:sp>
       <p:sp>
         <p:nvSpPr>
-          <p:cNvPr id="9" name="TextBox 8"/>
-          <p:cNvSpPr txBox="1"/>
-          <p:nvPr/>
-        </p:nvSpPr>
-        <p:spPr>
-          <a:xfrm>
-            <a:off x="896112" y="1735074"/>
-            <a:ext cx="402336" cy="219456"/>
-          </a:xfrm>
-          <a:prstGeom prst="rect">
-            <a:avLst/>
-          </a:prstGeom>
-          <a:noFill/>
-          <a:effectLst/>
-        </p:spPr>
-        <p:txBody>
-          <a:bodyPr wrap="square" anchor="t" lIns="0" rIns="0" tIns="0" bIns="0">
-            <a:spAutoFit/>
-          </a:bodyPr>
-          <a:lstStyle/>
-          <a:p>
-            <a:pPr algn="ctr">
-              <a:lnSpc>
-                <a:spcPct val="125000"/>
-              </a:lnSpc>
-              <a:spcAft>
-                <a:spcPts val="0"/>
-              </a:spcAft>
-            </a:pPr>
-            <a:r>
-              <a:rPr sz="1200" b="1" i="0">
-                <a:solidFill>
-                  <a:srgbClr val="FFFDF7"/>
-                </a:solidFill>
-                <a:latin typeface="Karla"/>
-              </a:rPr>
-              <a:t>1</a:t>
-            </a:r>
-          </a:p>
-        </p:txBody>
-      </p:sp>
-      <p:sp>
-        <p:nvSpPr>
-          <p:cNvPr id="10" name="TextBox 9"/>
-          <p:cNvSpPr txBox="1"/>
-          <p:nvPr/>
-        </p:nvSpPr>
-        <p:spPr>
-          <a:xfrm>
-            <a:off x="1554480" y="1572768"/>
-            <a:ext cx="6675120" cy="544068"/>
-          </a:xfrm>
-          <a:prstGeom prst="rect">
-            <a:avLst/>
-          </a:prstGeom>
-          <a:noFill/>
-          <a:effectLst/>
-        </p:spPr>
-        <p:txBody>
-          <a:bodyPr wrap="square" anchor="t" lIns="0" rIns="0" tIns="0" bIns="0">
-            <a:spAutoFit/>
-          </a:bodyPr>
-          <a:lstStyle/>
-          <a:p>
-            <a:pPr algn="l">
-              <a:lnSpc>
-                <a:spcPct val="115000"/>
-              </a:lnSpc>
-              <a:spcAft>
-                <a:spcPts val="0"/>
-              </a:spcAft>
-            </a:pPr>
-            <a:r>
-              <a:rPr sz="1700" b="1" i="0">
-                <a:solidFill>
-                  <a:srgbClr val="262422"/>
-                </a:solidFill>
-                <a:latin typeface="Libre Caslon Display"/>
-              </a:rPr>
-              <a:t>Where did you move on the line, and which card moved you?</a:t>
-            </a:r>
-          </a:p>
-        </p:txBody>
-      </p:sp>
-      <p:sp>
-        <p:nvSpPr>
-          <p:cNvPr id="11" name="Rectangle 10"/>
-          <p:cNvSpPr/>
-          <p:nvPr/>
-        </p:nvSpPr>
-        <p:spPr>
-          <a:xfrm>
-            <a:off x="685800" y="2537460"/>
-            <a:ext cx="7772400" cy="946403"/>
-          </a:xfrm>
-          <a:prstGeom prst="rect">
-            <a:avLst/>
-          </a:prstGeom>
-          <a:solidFill>
-            <a:srgbClr val="FFFFFF"/>
-          </a:solidFill>
-          <a:ln>
-            <a:noFill/>
-          </a:ln>
-          <a:effectLst/>
-        </p:spPr>
-        <p:style>
-          <a:lnRef idx="1">
-            <a:schemeClr val="accent1"/>
-          </a:lnRef>
-          <a:fillRef idx="3">
-            <a:schemeClr val="accent1"/>
-          </a:fillRef>
-          <a:effectRef idx="0">
-            <a:schemeClr val="accent1"/>
-          </a:effectRef>
-          <a:fontRef idx="minor">
-            <a:schemeClr val="lt1"/>
-          </a:fontRef>
-        </p:style>
-        <p:txBody>
-          <a:bodyPr rtlCol="0" anchor="ctr"/>
-          <a:lstStyle/>
-          <a:p>
-            <a:pPr algn="ctr"/>
-          </a:p>
-        </p:txBody>
-      </p:sp>
-      <p:sp>
-        <p:nvSpPr>
-          <p:cNvPr id="12" name="Rectangle 11"/>
-          <p:cNvSpPr/>
-          <p:nvPr/>
-        </p:nvSpPr>
-        <p:spPr>
-          <a:xfrm>
-            <a:off x="685800" y="2537460"/>
-            <a:ext cx="45720" cy="946403"/>
-          </a:xfrm>
-          <a:prstGeom prst="rect">
-            <a:avLst/>
-          </a:prstGeom>
-          <a:solidFill>
-            <a:srgbClr val="34322F"/>
-          </a:solidFill>
-          <a:ln>
-            <a:noFill/>
-          </a:ln>
-          <a:effectLst/>
-        </p:spPr>
-        <p:style>
-          <a:lnRef idx="1">
-            <a:schemeClr val="accent1"/>
-          </a:lnRef>
-          <a:fillRef idx="3">
-            <a:schemeClr val="accent1"/>
-          </a:fillRef>
-          <a:effectRef idx="0">
-            <a:schemeClr val="accent1"/>
-          </a:effectRef>
-          <a:fontRef idx="minor">
-            <a:schemeClr val="lt1"/>
-          </a:fontRef>
-        </p:style>
-        <p:txBody>
-          <a:bodyPr rtlCol="0" anchor="ctr"/>
-          <a:lstStyle/>
-          <a:p>
-            <a:pPr algn="ctr"/>
-          </a:p>
-        </p:txBody>
-      </p:sp>
-      <p:sp>
-        <p:nvSpPr>
-          <p:cNvPr id="13" name="Oval 12"/>
-          <p:cNvSpPr/>
-          <p:nvPr/>
-        </p:nvSpPr>
-        <p:spPr>
-          <a:xfrm>
-            <a:off x="896112" y="2809494"/>
-            <a:ext cx="402336" cy="402336"/>
-          </a:xfrm>
-          <a:prstGeom prst="ellipse">
-            <a:avLst/>
-          </a:prstGeom>
-          <a:solidFill>
-            <a:srgbClr val="34322F"/>
-          </a:solidFill>
-          <a:ln>
-            <a:noFill/>
-          </a:ln>
-          <a:effectLst/>
-        </p:spPr>
-        <p:style>
-          <a:lnRef idx="1">
-            <a:schemeClr val="accent1"/>
-          </a:lnRef>
-          <a:fillRef idx="3">
-            <a:schemeClr val="accent1"/>
-          </a:fillRef>
-          <a:effectRef idx="0">
-            <a:schemeClr val="accent1"/>
-          </a:effectRef>
-          <a:fontRef idx="minor">
-            <a:schemeClr val="lt1"/>
-          </a:fontRef>
-        </p:style>
-        <p:txBody>
-          <a:bodyPr rtlCol="0" anchor="ctr"/>
-          <a:lstStyle/>
-          <a:p>
-            <a:pPr algn="ctr"/>
-          </a:p>
-        </p:txBody>
-      </p:sp>
-      <p:sp>
-        <p:nvSpPr>
           <p:cNvPr id="14" name="TextBox 13"/>
           <p:cNvSpPr txBox="1"/>
           <p:nvPr/>
@@ -11572,7 +11297,7 @@
                 <a:solidFill>
                   <a:srgbClr val="FFFDF7"/>
                 </a:solidFill>
-                <a:latin typeface="Karla"/>
+                <a:latin typeface="Calibri"/>
               </a:rPr>
               <a:t>2</a:t>
             </a:r>
@@ -11611,11 +11336,11 @@
               </a:spcAft>
             </a:pPr>
             <a:r>
-              <a:rPr sz="1700" b="1" i="0">
+              <a:rPr sz="1700" b="0" i="0">
                 <a:solidFill>
                   <a:srgbClr val="262422"/>
                 </a:solidFill>
-                <a:latin typeface="Libre Caslon Display"/>
+                <a:latin typeface="Georgia"/>
               </a:rPr>
               <a:t>Next time you see a headline, which of the five questions will you ask first?</a:t>
             </a:r>
@@ -11658,7 +11383,7 @@
                 <a:solidFill>
                   <a:srgbClr val="34322F"/>
                 </a:solidFill>
-                <a:latin typeface="Karla"/>
+                <a:latin typeface="Calibri"/>
               </a:rPr>
               <a:t>Write your answers in the last box of your evidence sheet. It is yours to keep, and nothing is read out.</a:t>
             </a:r>
@@ -11726,7 +11451,7 @@
                 <a:solidFill>
                   <a:srgbClr val="8C877D"/>
                 </a:solidFill>
-                <a:latin typeface="Karla"/>
+                <a:latin typeface="Calibri"/>
               </a:rPr>
               <a:t>The Pastoral Guide</a:t>
             </a:r>
@@ -11769,7 +11494,7 @@
                 <a:solidFill>
                   <a:srgbClr val="8C877D"/>
                 </a:solidFill>
-                <a:latin typeface="Karla"/>
+                <a:latin typeface="Calibri"/>
               </a:rPr>
               <a:t>18 / 19</a:t>
             </a:r>
@@ -11886,7 +11611,7 @@
                 <a:solidFill>
                   <a:srgbClr val="34322F"/>
                 </a:solidFill>
-                <a:latin typeface="Karla"/>
+                <a:latin typeface="Calibri"/>
               </a:rPr>
               <a:t>FOR THE TEACHER  ·  SOURCES</a:t>
             </a:r>
@@ -11925,11 +11650,11 @@
               </a:spcAft>
             </a:pPr>
             <a:r>
-              <a:rPr sz="2600" b="1" i="0">
+              <a:rPr sz="2600" b="0" i="0">
                 <a:solidFill>
                   <a:srgbClr val="262422"/>
                 </a:solidFill>
-                <a:latin typeface="Libre Caslon Display"/>
+                <a:latin typeface="Georgia"/>
               </a:rPr>
               <a:t>Where the evidence came from</a:t>
             </a:r>
@@ -11972,7 +11697,7 @@
                 <a:solidFill>
                   <a:srgbClr val="262422"/>
                 </a:solidFill>
-                <a:latin typeface="Karla"/>
+                <a:latin typeface="Calibri"/>
               </a:rPr>
               <a:t>Wikipedia, Thalidomide and Thalidomide scandal, accessed September 2026.</a:t>
             </a:r>
@@ -12015,7 +11740,7 @@
                 <a:solidFill>
                   <a:srgbClr val="262422"/>
                 </a:solidFill>
-                <a:latin typeface="Karla"/>
+                <a:latin typeface="Calibri"/>
               </a:rPr>
               <a:t>Phillips S. (2020). How a courageous physician-scientist saved the U.S. from a birth-defects catastrophe. UChicago Medicine.</a:t>
             </a:r>
@@ -12058,7 +11783,7 @@
                 <a:solidFill>
                   <a:srgbClr val="262422"/>
                 </a:solidFill>
-                <a:latin typeface="Karla"/>
+                <a:latin typeface="Calibri"/>
               </a:rPr>
               <a:t>McNeill L. (2017). The woman who stood between America and a generation of thalidomide babies. Smithsonian Magazine.</a:t>
             </a:r>
@@ -12126,7 +11851,7 @@
                 <a:solidFill>
                   <a:srgbClr val="8C877D"/>
                 </a:solidFill>
-                <a:latin typeface="Karla"/>
+                <a:latin typeface="Calibri"/>
               </a:rPr>
               <a:t>The Pastoral Guide</a:t>
             </a:r>
@@ -12169,7 +11894,7 @@
                 <a:solidFill>
                   <a:srgbClr val="8C877D"/>
                 </a:solidFill>
-                <a:latin typeface="Karla"/>
+                <a:latin typeface="Calibri"/>
               </a:rPr>
               <a:t>19 / 19</a:t>
             </a:r>
@@ -12286,7 +12011,7 @@
                 <a:solidFill>
                   <a:srgbClr val="34322F"/>
                 </a:solidFill>
-                <a:latin typeface="Karla"/>
+                <a:latin typeface="Calibri"/>
               </a:rPr>
               <a:t>TEACHER SLIDE  ·  SKIP IT</a:t>
             </a:r>
@@ -12325,11 +12050,11 @@
               </a:spcAft>
             </a:pPr>
             <a:r>
-              <a:rPr sz="2800" b="1" i="0">
+              <a:rPr sz="2800" b="0" i="0">
                 <a:solidFill>
                   <a:srgbClr val="262422"/>
                 </a:solidFill>
-                <a:latin typeface="Libre Caslon Display"/>
+                <a:latin typeface="Georgia"/>
               </a:rPr>
               <a:t>Before the lesson</a:t>
             </a:r>
@@ -12372,7 +12097,7 @@
                 <a:solidFill>
                   <a:srgbClr val="56524B"/>
                 </a:solidFill>
-                <a:latin typeface="Karla"/>
+                <a:latin typeface="Calibri"/>
               </a:rPr>
               <a:t>This lesson is about how medicines are tested before they are sold, and the official who kept asking for better evidence.</a:t>
             </a:r>
@@ -12503,7 +12228,7 @@
                 <a:solidFill>
                   <a:srgbClr val="FFFDF7"/>
                 </a:solidFill>
-                <a:latin typeface="Karla"/>
+                <a:latin typeface="Calibri"/>
               </a:rPr>
               <a:t>1</a:t>
             </a:r>
@@ -12542,11 +12267,11 @@
               </a:spcAft>
             </a:pPr>
             <a:r>
-              <a:rPr sz="1300" b="1" i="0">
+              <a:rPr sz="1300" b="0" i="0">
                 <a:solidFill>
                   <a:srgbClr val="262422"/>
                 </a:solidFill>
-                <a:latin typeface="Libre Caslon Display"/>
+                <a:latin typeface="Georgia"/>
               </a:rPr>
               <a:t>Print and cut the evidence cards</a:t>
             </a:r>
@@ -12589,7 +12314,7 @@
                 <a:solidFill>
                   <a:srgbClr val="56524B"/>
                 </a:solidFill>
-                <a:latin typeface="Karla"/>
+                <a:latin typeface="Calibri"/>
               </a:rPr>
               <a:t>One set of four per group of three or four. Keep them in order, A to D.</a:t>
             </a:r>
@@ -12720,7 +12445,7 @@
                 <a:solidFill>
                   <a:srgbClr val="FFFDF7"/>
                 </a:solidFill>
-                <a:latin typeface="Karla"/>
+                <a:latin typeface="Calibri"/>
               </a:rPr>
               <a:t>2</a:t>
             </a:r>
@@ -12759,11 +12484,11 @@
               </a:spcAft>
             </a:pPr>
             <a:r>
-              <a:rPr sz="1300" b="1" i="0">
+              <a:rPr sz="1300" b="0" i="0">
                 <a:solidFill>
                   <a:srgbClr val="262422"/>
                 </a:solidFill>
-                <a:latin typeface="Libre Caslon Display"/>
+                <a:latin typeface="Georgia"/>
               </a:rPr>
               <a:t>Print two sheets per student</a:t>
             </a:r>
@@ -12806,7 +12531,7 @@
                 <a:solidFill>
                   <a:srgbClr val="56524B"/>
                 </a:solidFill>
-                <a:latin typeface="Karla"/>
+                <a:latin typeface="Calibri"/>
               </a:rPr>
               <a:t>This lesson’s evidence sheet, and the front page sheet, which is the same every lesson.</a:t>
             </a:r>
@@ -12937,7 +12662,7 @@
                 <a:solidFill>
                   <a:srgbClr val="FFFDF7"/>
                 </a:solidFill>
-                <a:latin typeface="Karla"/>
+                <a:latin typeface="Calibri"/>
               </a:rPr>
               <a:t>3</a:t>
             </a:r>
@@ -12976,11 +12701,11 @@
               </a:spcAft>
             </a:pPr>
             <a:r>
-              <a:rPr sz="1300" b="1" i="0">
+              <a:rPr sz="1300" b="0" i="0">
                 <a:solidFill>
                   <a:srgbClr val="262422"/>
                 </a:solidFill>
-                <a:latin typeface="Libre Caslon Display"/>
+                <a:latin typeface="Georgia"/>
               </a:rPr>
               <a:t>Mark out the line</a:t>
             </a:r>
@@ -13023,7 +12748,7 @@
                 <a:solidFill>
                   <a:srgbClr val="56524B"/>
                 </a:solidFill>
-                <a:latin typeface="Karla"/>
+                <a:latin typeface="Calibri"/>
               </a:rPr>
               <a:t>A 0 at one end of the room and a 10 at the other: definitely false to definitely true.</a:t>
             </a:r>
@@ -13154,7 +12879,7 @@
                 <a:solidFill>
                   <a:srgbClr val="FFFDF7"/>
                 </a:solidFill>
-                <a:latin typeface="Karla"/>
+                <a:latin typeface="Calibri"/>
               </a:rPr>
               <a:t>4</a:t>
             </a:r>
@@ -13193,11 +12918,11 @@
               </a:spcAft>
             </a:pPr>
             <a:r>
-              <a:rPr sz="1300" b="1" i="0">
+              <a:rPr sz="1300" b="0" i="0">
                 <a:solidFill>
                   <a:srgbClr val="262422"/>
                 </a:solidFill>
-                <a:latin typeface="Libre Caslon Display"/>
+                <a:latin typeface="Georgia"/>
               </a:rPr>
               <a:t>Hold the cards back</a:t>
             </a:r>
@@ -13240,7 +12965,7 @@
                 <a:solidFill>
                   <a:srgbClr val="56524B"/>
                 </a:solidFill>
-                <a:latin typeface="Karla"/>
+                <a:latin typeface="Calibri"/>
               </a:rPr>
               <a:t>Hand out one card per round, never the next one early. The verdict stays hidden until the end.</a:t>
             </a:r>
@@ -13308,7 +13033,7 @@
                 <a:solidFill>
                   <a:srgbClr val="8C877D"/>
                 </a:solidFill>
-                <a:latin typeface="Karla"/>
+                <a:latin typeface="Calibri"/>
               </a:rPr>
               <a:t>The Pastoral Guide</a:t>
             </a:r>
@@ -13351,7 +13076,7 @@
                 <a:solidFill>
                   <a:srgbClr val="8C877D"/>
                 </a:solidFill>
-                <a:latin typeface="Karla"/>
+                <a:latin typeface="Calibri"/>
               </a:rPr>
               <a:t>2 / 19</a:t>
             </a:r>
@@ -13456,7 +13181,7 @@
                 <a:solidFill>
                   <a:srgbClr val="34322F"/>
                 </a:solidFill>
-                <a:latin typeface="Karla"/>
+                <a:latin typeface="Calibri"/>
               </a:rPr>
               <a:t>QUESTION THE HEADLINE  ·  LESSON 2 OF 5</a:t>
             </a:r>
@@ -13499,7 +13224,7 @@
                 <a:solidFill>
                   <a:srgbClr val="8C877D"/>
                 </a:solidFill>
-                <a:latin typeface="Karla"/>
+                <a:latin typeface="Calibri"/>
               </a:rPr>
               <a:t>A recreated front page</a:t>
             </a:r>
@@ -13582,11 +13307,11 @@
               </a:spcAft>
             </a:pPr>
             <a:r>
-              <a:rPr sz="3000" b="1" i="0">
+              <a:rPr sz="3000" b="0" i="0">
                 <a:solidFill>
                   <a:srgbClr val="262422"/>
                 </a:solidFill>
-                <a:latin typeface="Libre Caslon Display"/>
+                <a:latin typeface="Georgia"/>
               </a:rPr>
               <a:t>The Daily Claim</a:t>
             </a:r>
@@ -13673,7 +13398,7 @@
                 <a:solidFill>
                   <a:srgbClr val="56524B"/>
                 </a:solidFill>
-                <a:latin typeface="Karla"/>
+                <a:latin typeface="Calibri"/>
               </a:rPr>
               <a:t>LONDON, 1958</a:t>
             </a:r>
@@ -13716,7 +13441,7 @@
                 <a:solidFill>
                   <a:srgbClr val="56524B"/>
                 </a:solidFill>
-                <a:latin typeface="Karla"/>
+                <a:latin typeface="Calibri"/>
               </a:rPr>
               <a:t>VOLUME ONE</a:t>
             </a:r>
@@ -13759,7 +13484,7 @@
                 <a:solidFill>
                   <a:srgbClr val="56524B"/>
                 </a:solidFill>
-                <a:latin typeface="Karla"/>
+                <a:latin typeface="Calibri"/>
               </a:rPr>
               <a:t>LESSON 2 OF 5</a:t>
             </a:r>
@@ -13842,11 +13567,11 @@
               </a:spcAft>
             </a:pPr>
             <a:r>
-              <a:rPr sz="2800" b="1" i="0">
+              <a:rPr sz="2800" b="0" i="0">
                 <a:solidFill>
                   <a:srgbClr val="262422"/>
                 </a:solidFill>
-                <a:latin typeface="Libre Caslon Display"/>
+                <a:latin typeface="Georgia"/>
               </a:rPr>
               <a:t>NEW SLEEPING PILL IS SAFE</a:t>
             </a:r>
@@ -13854,11 +13579,11 @@
               <a:rPr lang="en-GB"/>
             </a:br>
             <a:r>
-              <a:rPr sz="2800" b="1" i="0">
+              <a:rPr sz="2800" b="0" i="0">
                 <a:solidFill>
                   <a:srgbClr val="262422"/>
                 </a:solidFill>
-                <a:latin typeface="Libre Caslon Display"/>
+                <a:latin typeface="Georgia"/>
               </a:rPr>
               <a:t>FOR MOTHERS-TO-BE</a:t>
             </a:r>
@@ -14246,11 +13971,11 @@
               </a:spcAft>
             </a:pPr>
             <a:r>
-              <a:rPr sz="1200" b="1" i="0">
+              <a:rPr sz="1200" b="0" i="0">
                 <a:solidFill>
                   <a:srgbClr val="34322F"/>
                 </a:solidFill>
-                <a:latin typeface="Libre Caslon Display"/>
+                <a:latin typeface="Georgia"/>
               </a:rPr>
               <a:t>“Distaval can be given with complete safety to pregnant women and nursing mothers…”</a:t>
             </a:r>
@@ -14293,7 +14018,7 @@
                 <a:solidFill>
                   <a:srgbClr val="56524B"/>
                 </a:solidFill>
-                <a:latin typeface="Karla"/>
+                <a:latin typeface="Calibri"/>
               </a:rPr>
               <a:t>FROM AN ADVERT FOR DISTAVAL</a:t>
             </a:r>
@@ -14361,7 +14086,7 @@
                 <a:solidFill>
                   <a:srgbClr val="8C877D"/>
                 </a:solidFill>
-                <a:latin typeface="Karla"/>
+                <a:latin typeface="Calibri"/>
               </a:rPr>
               <a:t>The Pastoral Guide</a:t>
             </a:r>
@@ -14404,7 +14129,7 @@
                 <a:solidFill>
                   <a:srgbClr val="8C877D"/>
                 </a:solidFill>
-                <a:latin typeface="Karla"/>
+                <a:latin typeface="Calibri"/>
               </a:rPr>
               <a:t>3 / 19</a:t>
             </a:r>
@@ -14509,64 +14234,9 @@
                 <a:solidFill>
                   <a:srgbClr val="34322F"/>
                 </a:solidFill>
-                <a:latin typeface="Karla"/>
+                <a:latin typeface="Calibri"/>
               </a:rPr>
               <a:t>QUESTION THE HEADLINE  ·  LESSON 2 OF 5</a:t>
-            </a:r>
-          </a:p>
-        </p:txBody>
-      </p:sp>
-      <p:sp>
-        <p:nvSpPr>
-          <p:cNvPr id="4" name="Rounded Rectangle 3"/>
-          <p:cNvSpPr/>
-          <p:nvPr/>
-        </p:nvSpPr>
-        <p:spPr>
-          <a:xfrm>
-            <a:off x="7398742" y="246888"/>
-            <a:ext cx="1059457" cy="237744"/>
-          </a:xfrm>
-          <a:prstGeom prst="roundRect">
-            <a:avLst>
-              <a:gd name="adj" fmla="val 50000"/>
-            </a:avLst>
-          </a:prstGeom>
-          <a:solidFill>
-            <a:srgbClr val="34322F"/>
-          </a:solidFill>
-          <a:ln>
-            <a:noFill/>
-          </a:ln>
-          <a:effectLst/>
-        </p:spPr>
-        <p:style>
-          <a:lnRef idx="1">
-            <a:schemeClr val="accent1"/>
-          </a:lnRef>
-          <a:fillRef idx="3">
-            <a:schemeClr val="accent1"/>
-          </a:fillRef>
-          <a:effectRef idx="0">
-            <a:schemeClr val="accent1"/>
-          </a:effectRef>
-          <a:fontRef idx="minor">
-            <a:schemeClr val="lt1"/>
-          </a:fontRef>
-        </p:style>
-        <p:txBody>
-          <a:bodyPr rtlCol="0" anchor="ctr" wrap="none" lIns="0" rIns="0" tIns="0" bIns="0"/>
-          <a:lstStyle/>
-          <a:p>
-            <a:pPr algn="ctr"/>
-            <a:r>
-              <a:rPr sz="950" b="1" spc="90">
-                <a:solidFill>
-                  <a:srgbClr val="FFFDF7"/>
-                </a:solidFill>
-                <a:latin typeface="Karla"/>
-              </a:rPr>
-              <a:t>STAND UP</a:t>
             </a:r>
           </a:p>
         </p:txBody>
@@ -14603,11 +14273,11 @@
               </a:spcAft>
             </a:pPr>
             <a:r>
-              <a:rPr sz="2800" b="1" i="0">
+              <a:rPr sz="2800" b="0" i="0">
                 <a:solidFill>
                   <a:srgbClr val="262422"/>
                 </a:solidFill>
-                <a:latin typeface="Libre Caslon Display"/>
+                <a:latin typeface="Georgia"/>
               </a:rPr>
               <a:t>How much do you believe it?</a:t>
             </a:r>
@@ -14740,11 +14410,11 @@
               </a:spcAft>
             </a:pPr>
             <a:r>
-              <a:rPr sz="1800" b="1" i="0">
+              <a:rPr sz="1800" b="0" i="0">
                 <a:solidFill>
                   <a:srgbClr val="262422"/>
                 </a:solidFill>
-                <a:latin typeface="Libre Caslon Display"/>
+                <a:latin typeface="Georgia"/>
               </a:rPr>
               <a:t>“If a medicine is sold by a big company and prescribed by doctors, it must have been tested properly.”</a:t>
             </a:r>
@@ -14875,7 +14545,7 @@
                 <a:solidFill>
                   <a:srgbClr val="262422"/>
                 </a:solidFill>
-                <a:latin typeface="Karla"/>
+                <a:latin typeface="Calibri"/>
               </a:rPr>
               <a:t>0</a:t>
             </a:r>
@@ -14962,7 +14632,7 @@
                 <a:solidFill>
                   <a:srgbClr val="56524B"/>
                 </a:solidFill>
-                <a:latin typeface="Karla"/>
+                <a:latin typeface="Calibri"/>
               </a:rPr>
               <a:t>1</a:t>
             </a:r>
@@ -15049,7 +14719,7 @@
                 <a:solidFill>
                   <a:srgbClr val="56524B"/>
                 </a:solidFill>
-                <a:latin typeface="Karla"/>
+                <a:latin typeface="Calibri"/>
               </a:rPr>
               <a:t>2</a:t>
             </a:r>
@@ -15136,7 +14806,7 @@
                 <a:solidFill>
                   <a:srgbClr val="56524B"/>
                 </a:solidFill>
-                <a:latin typeface="Karla"/>
+                <a:latin typeface="Calibri"/>
               </a:rPr>
               <a:t>3</a:t>
             </a:r>
@@ -15223,7 +14893,7 @@
                 <a:solidFill>
                   <a:srgbClr val="56524B"/>
                 </a:solidFill>
-                <a:latin typeface="Karla"/>
+                <a:latin typeface="Calibri"/>
               </a:rPr>
               <a:t>4</a:t>
             </a:r>
@@ -15310,7 +14980,7 @@
                 <a:solidFill>
                   <a:srgbClr val="262422"/>
                 </a:solidFill>
-                <a:latin typeface="Karla"/>
+                <a:latin typeface="Calibri"/>
               </a:rPr>
               <a:t>5</a:t>
             </a:r>
@@ -15397,7 +15067,7 @@
                 <a:solidFill>
                   <a:srgbClr val="56524B"/>
                 </a:solidFill>
-                <a:latin typeface="Karla"/>
+                <a:latin typeface="Calibri"/>
               </a:rPr>
               <a:t>6</a:t>
             </a:r>
@@ -15484,7 +15154,7 @@
                 <a:solidFill>
                   <a:srgbClr val="56524B"/>
                 </a:solidFill>
-                <a:latin typeface="Karla"/>
+                <a:latin typeface="Calibri"/>
               </a:rPr>
               <a:t>7</a:t>
             </a:r>
@@ -15571,7 +15241,7 @@
                 <a:solidFill>
                   <a:srgbClr val="56524B"/>
                 </a:solidFill>
-                <a:latin typeface="Karla"/>
+                <a:latin typeface="Calibri"/>
               </a:rPr>
               <a:t>8</a:t>
             </a:r>
@@ -15658,7 +15328,7 @@
                 <a:solidFill>
                   <a:srgbClr val="56524B"/>
                 </a:solidFill>
-                <a:latin typeface="Karla"/>
+                <a:latin typeface="Calibri"/>
               </a:rPr>
               <a:t>9</a:t>
             </a:r>
@@ -15745,7 +15415,7 @@
                 <a:solidFill>
                   <a:srgbClr val="262422"/>
                 </a:solidFill>
-                <a:latin typeface="Karla"/>
+                <a:latin typeface="Calibri"/>
               </a:rPr>
               <a:t>10</a:t>
             </a:r>
@@ -15788,7 +15458,7 @@
                 <a:solidFill>
                   <a:srgbClr val="34322F"/>
                 </a:solidFill>
-                <a:latin typeface="Karla"/>
+                <a:latin typeface="Calibri"/>
               </a:rPr>
               <a:t>Definitely false</a:t>
             </a:r>
@@ -15831,7 +15501,7 @@
                 <a:solidFill>
                   <a:srgbClr val="34322F"/>
                 </a:solidFill>
-                <a:latin typeface="Karla"/>
+                <a:latin typeface="Calibri"/>
               </a:rPr>
               <a:t>Definitely true</a:t>
             </a:r>
@@ -15874,7 +15544,7 @@
                 <a:solidFill>
                   <a:srgbClr val="34322F"/>
                 </a:solidFill>
-                <a:latin typeface="Karla"/>
+                <a:latin typeface="Calibri"/>
               </a:rPr>
               <a:t>Stand on the line where you are now. Two or three people say why they are standing there.</a:t>
             </a:r>
@@ -15942,7 +15612,7 @@
                 <a:solidFill>
                   <a:srgbClr val="8C877D"/>
                 </a:solidFill>
-                <a:latin typeface="Karla"/>
+                <a:latin typeface="Calibri"/>
               </a:rPr>
               <a:t>The Pastoral Guide</a:t>
             </a:r>
@@ -15985,7 +15655,7 @@
                 <a:solidFill>
                   <a:srgbClr val="8C877D"/>
                 </a:solidFill>
-                <a:latin typeface="Karla"/>
+                <a:latin typeface="Calibri"/>
               </a:rPr>
               <a:t>4 / 19</a:t>
             </a:r>
@@ -16090,64 +15760,9 @@
                 <a:solidFill>
                   <a:srgbClr val="34322F"/>
                 </a:solidFill>
-                <a:latin typeface="Karla"/>
+                <a:latin typeface="Calibri"/>
               </a:rPr>
               <a:t>QUESTION THE HEADLINE  ·  LESSON 2 OF 5</a:t>
-            </a:r>
-          </a:p>
-        </p:txBody>
-      </p:sp>
-      <p:sp>
-        <p:nvSpPr>
-          <p:cNvPr id="4" name="Rounded Rectangle 3"/>
-          <p:cNvSpPr/>
-          <p:nvPr/>
-        </p:nvSpPr>
-        <p:spPr>
-          <a:xfrm>
-            <a:off x="7658580" y="246888"/>
-            <a:ext cx="799619" cy="237744"/>
-          </a:xfrm>
-          <a:prstGeom prst="roundRect">
-            <a:avLst>
-              <a:gd name="adj" fmla="val 50000"/>
-            </a:avLst>
-          </a:prstGeom>
-          <a:solidFill>
-            <a:srgbClr val="34322F"/>
-          </a:solidFill>
-          <a:ln>
-            <a:noFill/>
-          </a:ln>
-          <a:effectLst/>
-        </p:spPr>
-        <p:style>
-          <a:lnRef idx="1">
-            <a:schemeClr val="accent1"/>
-          </a:lnRef>
-          <a:fillRef idx="3">
-            <a:schemeClr val="accent1"/>
-          </a:fillRef>
-          <a:effectRef idx="0">
-            <a:schemeClr val="accent1"/>
-          </a:effectRef>
-          <a:fontRef idx="minor">
-            <a:schemeClr val="lt1"/>
-          </a:fontRef>
-        </p:style>
-        <p:txBody>
-          <a:bodyPr rtlCol="0" anchor="ctr" wrap="none" lIns="0" rIns="0" tIns="0" bIns="0"/>
-          <a:lstStyle/>
-          <a:p>
-            <a:pPr algn="ctr"/>
-            <a:r>
-              <a:rPr sz="950" b="1" spc="90">
-                <a:solidFill>
-                  <a:srgbClr val="FFFDF7"/>
-                </a:solidFill>
-                <a:latin typeface="Karla"/>
-              </a:rPr>
-              <a:t>TEACH</a:t>
             </a:r>
           </a:p>
         </p:txBody>
@@ -16184,11 +15799,11 @@
               </a:spcAft>
             </a:pPr>
             <a:r>
-              <a:rPr sz="2800" b="1" i="0">
+              <a:rPr sz="2800" b="0" i="0">
                 <a:solidFill>
                   <a:srgbClr val="262422"/>
                 </a:solidFill>
-                <a:latin typeface="Libre Caslon Display"/>
+                <a:latin typeface="Georgia"/>
               </a:rPr>
               <a:t>Five questions for any headline</a:t>
             </a:r>
@@ -16340,11 +15955,11 @@
               </a:spcAft>
             </a:pPr>
             <a:r>
-              <a:rPr sz="1300" b="1" i="0">
+              <a:rPr sz="1300" b="0" i="0">
                 <a:solidFill>
                   <a:srgbClr val="262422"/>
                 </a:solidFill>
-                <a:latin typeface="Libre Caslon Display"/>
+                <a:latin typeface="Georgia"/>
               </a:rPr>
               <a:t>Who is saying it?</a:t>
             </a:r>
@@ -16387,7 +16002,7 @@
                 <a:solidFill>
                   <a:srgbClr val="56524B"/>
                 </a:solidFill>
-                <a:latin typeface="Karla"/>
+                <a:latin typeface="Calibri"/>
               </a:rPr>
               <a:t>A company, a scientist, a newspaper, a government? Check the name.</a:t>
             </a:r>
@@ -16539,11 +16154,11 @@
               </a:spcAft>
             </a:pPr>
             <a:r>
-              <a:rPr sz="1300" b="1" i="0">
+              <a:rPr sz="1300" b="0" i="0">
                 <a:solidFill>
                   <a:srgbClr val="262422"/>
                 </a:solidFill>
-                <a:latin typeface="Libre Caslon Display"/>
+                <a:latin typeface="Georgia"/>
               </a:rPr>
               <a:t>Who gains if I believe it?</a:t>
             </a:r>
@@ -16586,7 +16201,7 @@
                 <a:solidFill>
                   <a:srgbClr val="56524B"/>
                 </a:solidFill>
-                <a:latin typeface="Karla"/>
+                <a:latin typeface="Calibri"/>
               </a:rPr>
               <a:t>Somebody always does. Work out who, and what they get.</a:t>
             </a:r>
@@ -16738,11 +16353,11 @@
               </a:spcAft>
             </a:pPr>
             <a:r>
-              <a:rPr sz="1300" b="1" i="0">
+              <a:rPr sz="1300" b="0" i="0">
                 <a:solidFill>
                   <a:srgbClr val="262422"/>
                 </a:solidFill>
-                <a:latin typeface="Libre Caslon Display"/>
+                <a:latin typeface="Georgia"/>
               </a:rPr>
               <a:t>Who paid for it?</a:t>
             </a:r>
@@ -16785,7 +16400,7 @@
                 <a:solidFill>
                   <a:srgbClr val="56524B"/>
                 </a:solidFill>
-                <a:latin typeface="Karla"/>
+                <a:latin typeface="Calibri"/>
               </a:rPr>
               <a:t>The research, the advert, the survey. Money does not make it false, but you should know.</a:t>
             </a:r>
@@ -16937,11 +16552,11 @@
               </a:spcAft>
             </a:pPr>
             <a:r>
-              <a:rPr sz="1300" b="1" i="0">
+              <a:rPr sz="1300" b="0" i="0">
                 <a:solidFill>
                   <a:srgbClr val="262422"/>
                 </a:solidFill>
-                <a:latin typeface="Libre Caslon Display"/>
+                <a:latin typeface="Georgia"/>
               </a:rPr>
               <a:t>What is the evidence?</a:t>
             </a:r>
@@ -16984,7 +16599,7 @@
                 <a:solidFill>
                   <a:srgbClr val="56524B"/>
                 </a:solidFill>
-                <a:latin typeface="Karla"/>
+                <a:latin typeface="Calibri"/>
               </a:rPr>
               <a:t>A study, a number, a graph? Or only a slogan and a famous face?</a:t>
             </a:r>
@@ -17136,11 +16751,11 @@
               </a:spcAft>
             </a:pPr>
             <a:r>
-              <a:rPr sz="1300" b="1" i="0">
+              <a:rPr sz="1300" b="0" i="0">
                 <a:solidFill>
                   <a:srgbClr val="262422"/>
                 </a:solidFill>
-                <a:latin typeface="Libre Caslon Display"/>
+                <a:latin typeface="Georgia"/>
               </a:rPr>
               <a:t>Has it been tested, and by whom?</a:t>
             </a:r>
@@ -17183,7 +16798,7 @@
                 <a:solidFill>
                   <a:srgbClr val="56524B"/>
                 </a:solidFill>
-                <a:latin typeface="Karla"/>
+                <a:latin typeface="Calibri"/>
               </a:rPr>
               <a:t>Tested on whom, for how long, and by somebody with nothing to gain?</a:t>
             </a:r>
@@ -17226,7 +16841,7 @@
                 <a:solidFill>
                   <a:srgbClr val="34322F"/>
                 </a:solidFill>
-                <a:latin typeface="Karla"/>
+                <a:latin typeface="Calibri"/>
               </a:rPr>
               <a:t>These five come back in every lesson. The first one is on the front page already.</a:t>
             </a:r>
@@ -17294,7 +16909,7 @@
                 <a:solidFill>
                   <a:srgbClr val="8C877D"/>
                 </a:solidFill>
-                <a:latin typeface="Karla"/>
+                <a:latin typeface="Calibri"/>
               </a:rPr>
               <a:t>The Pastoral Guide</a:t>
             </a:r>
@@ -17337,7 +16952,7 @@
                 <a:solidFill>
                   <a:srgbClr val="8C877D"/>
                 </a:solidFill>
-                <a:latin typeface="Karla"/>
+                <a:latin typeface="Calibri"/>
               </a:rPr>
               <a:t>5 / 19</a:t>
             </a:r>
@@ -17442,7 +17057,7 @@
                 <a:solidFill>
                   <a:srgbClr val="34322F"/>
                 </a:solidFill>
-                <a:latin typeface="Karla"/>
+                <a:latin typeface="Calibri"/>
               </a:rPr>
               <a:t>QUESTION THE HEADLINE  ·  LESSON 2 OF 5</a:t>
             </a:r>
@@ -17451,19 +17066,147 @@
       </p:sp>
       <p:sp>
         <p:nvSpPr>
-          <p:cNvPr id="4" name="Rounded Rectangle 3"/>
+          <p:cNvPr id="5" name="TextBox 4"/>
+          <p:cNvSpPr txBox="1"/>
+          <p:nvPr/>
+        </p:nvSpPr>
+        <p:spPr>
+          <a:xfrm>
+            <a:off x="685800" y="566928"/>
+            <a:ext cx="7772400" cy="434848"/>
+          </a:xfrm>
+          <a:prstGeom prst="rect">
+            <a:avLst/>
+          </a:prstGeom>
+          <a:noFill/>
+          <a:effectLst/>
+        </p:spPr>
+        <p:txBody>
+          <a:bodyPr wrap="square" anchor="t" lIns="0" rIns="0" tIns="0" bIns="0">
+            <a:spAutoFit/>
+          </a:bodyPr>
+          <a:lstStyle/>
+          <a:p>
+            <a:pPr algn="l">
+              <a:lnSpc>
+                <a:spcPct val="105000"/>
+              </a:lnSpc>
+              <a:spcAft>
+                <a:spcPts val="0"/>
+              </a:spcAft>
+            </a:pPr>
+            <a:r>
+              <a:rPr sz="2800" b="0" i="0">
+                <a:solidFill>
+                  <a:srgbClr val="262422"/>
+                </a:solidFill>
+                <a:latin typeface="Georgia"/>
+              </a:rPr>
+              <a:t>Watch the first one</a:t>
+            </a:r>
+          </a:p>
+        </p:txBody>
+      </p:sp>
+      <p:sp>
+        <p:nvSpPr>
+          <p:cNvPr id="6" name="TextBox 5"/>
+          <p:cNvSpPr txBox="1"/>
+          <p:nvPr/>
+        </p:nvSpPr>
+        <p:spPr>
+          <a:xfrm>
+            <a:off x="685800" y="1170432"/>
+            <a:ext cx="7772400" cy="274320"/>
+          </a:xfrm>
+          <a:prstGeom prst="rect">
+            <a:avLst/>
+          </a:prstGeom>
+          <a:noFill/>
+          <a:effectLst/>
+        </p:spPr>
+        <p:txBody>
+          <a:bodyPr wrap="square" anchor="t" lIns="0" rIns="0" tIns="0" bIns="0">
+            <a:spAutoFit/>
+          </a:bodyPr>
+          <a:lstStyle/>
+          <a:p>
+            <a:pPr algn="l">
+              <a:lnSpc>
+                <a:spcPct val="125000"/>
+              </a:lnSpc>
+              <a:spcAft>
+                <a:spcPts val="0"/>
+              </a:spcAft>
+            </a:pPr>
+            <a:r>
+              <a:rPr sz="1600" b="0" i="0">
+                <a:solidFill>
+                  <a:srgbClr val="34322F"/>
+                </a:solidFill>
+                <a:latin typeface="Georgia"/>
+              </a:rPr>
+              <a:t>Question 1:  Who is saying it?</a:t>
+            </a:r>
+          </a:p>
+        </p:txBody>
+      </p:sp>
+      <p:sp>
+        <p:nvSpPr>
+          <p:cNvPr id="7" name="Rectangle 6"/>
           <p:cNvSpPr/>
           <p:nvPr/>
         </p:nvSpPr>
         <p:spPr>
           <a:xfrm>
-            <a:off x="7624101" y="246888"/>
-            <a:ext cx="834098" cy="237744"/>
-          </a:xfrm>
-          <a:prstGeom prst="roundRect">
-            <a:avLst>
-              <a:gd name="adj" fmla="val 50000"/>
-            </a:avLst>
+            <a:off x="685800" y="1609344"/>
+            <a:ext cx="7772400" cy="985520"/>
+          </a:xfrm>
+          <a:prstGeom prst="rect">
+            <a:avLst/>
+          </a:prstGeom>
+          <a:solidFill>
+            <a:srgbClr val="FFFFFF"/>
+          </a:solidFill>
+          <a:ln>
+            <a:noFill/>
+          </a:ln>
+          <a:effectLst/>
+        </p:spPr>
+        <p:style>
+          <a:lnRef idx="1">
+            <a:schemeClr val="accent1"/>
+          </a:lnRef>
+          <a:fillRef idx="3">
+            <a:schemeClr val="accent1"/>
+          </a:fillRef>
+          <a:effectRef idx="0">
+            <a:schemeClr val="accent1"/>
+          </a:effectRef>
+          <a:fontRef idx="minor">
+            <a:schemeClr val="lt1"/>
+          </a:fontRef>
+        </p:style>
+        <p:txBody>
+          <a:bodyPr rtlCol="0" anchor="ctr"/>
+          <a:lstStyle/>
+          <a:p>
+            <a:pPr algn="ctr"/>
+          </a:p>
+        </p:txBody>
+      </p:sp>
+      <p:sp>
+        <p:nvSpPr>
+          <p:cNvPr id="8" name="Rectangle 7"/>
+          <p:cNvSpPr/>
+          <p:nvPr/>
+        </p:nvSpPr>
+        <p:spPr>
+          <a:xfrm>
+            <a:off x="685800" y="1609344"/>
+            <a:ext cx="45720" cy="985520"/>
+          </a:xfrm>
+          <a:prstGeom prst="rect">
+            <a:avLst/>
           </a:prstGeom>
           <a:solidFill>
             <a:srgbClr val="34322F"/>
@@ -17488,189 +17231,6 @@
           </a:fontRef>
         </p:style>
         <p:txBody>
-          <a:bodyPr rtlCol="0" anchor="ctr" wrap="none" lIns="0" rIns="0" tIns="0" bIns="0"/>
-          <a:lstStyle/>
-          <a:p>
-            <a:pPr algn="ctr"/>
-            <a:r>
-              <a:rPr sz="950" b="1" spc="90">
-                <a:solidFill>
-                  <a:srgbClr val="FFFDF7"/>
-                </a:solidFill>
-                <a:latin typeface="Karla"/>
-              </a:rPr>
-              <a:t>MODEL</a:t>
-            </a:r>
-          </a:p>
-        </p:txBody>
-      </p:sp>
-      <p:sp>
-        <p:nvSpPr>
-          <p:cNvPr id="5" name="TextBox 4"/>
-          <p:cNvSpPr txBox="1"/>
-          <p:nvPr/>
-        </p:nvSpPr>
-        <p:spPr>
-          <a:xfrm>
-            <a:off x="685800" y="566928"/>
-            <a:ext cx="7772400" cy="434848"/>
-          </a:xfrm>
-          <a:prstGeom prst="rect">
-            <a:avLst/>
-          </a:prstGeom>
-          <a:noFill/>
-          <a:effectLst/>
-        </p:spPr>
-        <p:txBody>
-          <a:bodyPr wrap="square" anchor="t" lIns="0" rIns="0" tIns="0" bIns="0">
-            <a:spAutoFit/>
-          </a:bodyPr>
-          <a:lstStyle/>
-          <a:p>
-            <a:pPr algn="l">
-              <a:lnSpc>
-                <a:spcPct val="105000"/>
-              </a:lnSpc>
-              <a:spcAft>
-                <a:spcPts val="0"/>
-              </a:spcAft>
-            </a:pPr>
-            <a:r>
-              <a:rPr sz="2800" b="1" i="0">
-                <a:solidFill>
-                  <a:srgbClr val="262422"/>
-                </a:solidFill>
-                <a:latin typeface="Libre Caslon Display"/>
-              </a:rPr>
-              <a:t>Watch the first one</a:t>
-            </a:r>
-          </a:p>
-        </p:txBody>
-      </p:sp>
-      <p:sp>
-        <p:nvSpPr>
-          <p:cNvPr id="6" name="TextBox 5"/>
-          <p:cNvSpPr txBox="1"/>
-          <p:nvPr/>
-        </p:nvSpPr>
-        <p:spPr>
-          <a:xfrm>
-            <a:off x="685800" y="1170432"/>
-            <a:ext cx="7772400" cy="274320"/>
-          </a:xfrm>
-          <a:prstGeom prst="rect">
-            <a:avLst/>
-          </a:prstGeom>
-          <a:noFill/>
-          <a:effectLst/>
-        </p:spPr>
-        <p:txBody>
-          <a:bodyPr wrap="square" anchor="t" lIns="0" rIns="0" tIns="0" bIns="0">
-            <a:spAutoFit/>
-          </a:bodyPr>
-          <a:lstStyle/>
-          <a:p>
-            <a:pPr algn="l">
-              <a:lnSpc>
-                <a:spcPct val="125000"/>
-              </a:lnSpc>
-              <a:spcAft>
-                <a:spcPts val="0"/>
-              </a:spcAft>
-            </a:pPr>
-            <a:r>
-              <a:rPr sz="1600" b="1" i="0">
-                <a:solidFill>
-                  <a:srgbClr val="34322F"/>
-                </a:solidFill>
-                <a:latin typeface="Libre Caslon Display"/>
-              </a:rPr>
-              <a:t>Question 1:  Who is saying it?</a:t>
-            </a:r>
-          </a:p>
-        </p:txBody>
-      </p:sp>
-      <p:sp>
-        <p:nvSpPr>
-          <p:cNvPr id="7" name="Rectangle 6"/>
-          <p:cNvSpPr/>
-          <p:nvPr/>
-        </p:nvSpPr>
-        <p:spPr>
-          <a:xfrm>
-            <a:off x="685800" y="1609344"/>
-            <a:ext cx="7772400" cy="985520"/>
-          </a:xfrm>
-          <a:prstGeom prst="rect">
-            <a:avLst/>
-          </a:prstGeom>
-          <a:solidFill>
-            <a:srgbClr val="FFFFFF"/>
-          </a:solidFill>
-          <a:ln>
-            <a:noFill/>
-          </a:ln>
-          <a:effectLst/>
-        </p:spPr>
-        <p:style>
-          <a:lnRef idx="1">
-            <a:schemeClr val="accent1"/>
-          </a:lnRef>
-          <a:fillRef idx="3">
-            <a:schemeClr val="accent1"/>
-          </a:fillRef>
-          <a:effectRef idx="0">
-            <a:schemeClr val="accent1"/>
-          </a:effectRef>
-          <a:fontRef idx="minor">
-            <a:schemeClr val="lt1"/>
-          </a:fontRef>
-        </p:style>
-        <p:txBody>
-          <a:bodyPr rtlCol="0" anchor="ctr"/>
-          <a:lstStyle/>
-          <a:p>
-            <a:pPr algn="ctr"/>
-          </a:p>
-        </p:txBody>
-      </p:sp>
-      <p:sp>
-        <p:nvSpPr>
-          <p:cNvPr id="8" name="Rectangle 7"/>
-          <p:cNvSpPr/>
-          <p:nvPr/>
-        </p:nvSpPr>
-        <p:spPr>
-          <a:xfrm>
-            <a:off x="685800" y="1609344"/>
-            <a:ext cx="45720" cy="985520"/>
-          </a:xfrm>
-          <a:prstGeom prst="rect">
-            <a:avLst/>
-          </a:prstGeom>
-          <a:solidFill>
-            <a:srgbClr val="34322F"/>
-          </a:solidFill>
-          <a:ln>
-            <a:noFill/>
-          </a:ln>
-          <a:effectLst/>
-        </p:spPr>
-        <p:style>
-          <a:lnRef idx="1">
-            <a:schemeClr val="accent1"/>
-          </a:lnRef>
-          <a:fillRef idx="3">
-            <a:schemeClr val="accent1"/>
-          </a:fillRef>
-          <a:effectRef idx="0">
-            <a:schemeClr val="accent1"/>
-          </a:effectRef>
-          <a:fontRef idx="minor">
-            <a:schemeClr val="lt1"/>
-          </a:fontRef>
-        </p:style>
-        <p:txBody>
           <a:bodyPr rtlCol="0" anchor="ctr"/>
           <a:lstStyle/>
           <a:p>
@@ -17714,7 +17274,7 @@
                 <a:solidFill>
                   <a:srgbClr val="262422"/>
                 </a:solidFill>
-                <a:latin typeface="Karla"/>
+                <a:latin typeface="Calibri"/>
               </a:rPr>
               <a:t>The company that makes and sells the drug. It gains every time a doctor believes it, and the front page gives no test results at all.</a:t>
             </a:r>
@@ -17757,7 +17317,7 @@
                 <a:solidFill>
                   <a:srgbClr val="56524B"/>
                 </a:solidFill>
-                <a:latin typeface="Karla"/>
+                <a:latin typeface="Calibri"/>
               </a:rPr>
               <a:t>Notice the answer is not true or false. It tells you what to look for next.</a:t>
             </a:r>
@@ -17825,7 +17385,7 @@
                 <a:solidFill>
                   <a:srgbClr val="8C877D"/>
                 </a:solidFill>
-                <a:latin typeface="Karla"/>
+                <a:latin typeface="Calibri"/>
               </a:rPr>
               <a:t>The Pastoral Guide</a:t>
             </a:r>
@@ -17868,7 +17428,7 @@
                 <a:solidFill>
                   <a:srgbClr val="8C877D"/>
                 </a:solidFill>
-                <a:latin typeface="Karla"/>
+                <a:latin typeface="Calibri"/>
               </a:rPr>
               <a:t>6 / 19</a:t>
             </a:r>
@@ -17973,64 +17533,9 @@
                 <a:solidFill>
                   <a:srgbClr val="34322F"/>
                 </a:solidFill>
-                <a:latin typeface="Karla"/>
+                <a:latin typeface="Calibri"/>
               </a:rPr>
               <a:t>QUESTION THE HEADLINE  ·  LESSON 2 OF 5</a:t>
-            </a:r>
-          </a:p>
-        </p:txBody>
-      </p:sp>
-      <p:sp>
-        <p:nvSpPr>
-          <p:cNvPr id="4" name="Rounded Rectangle 3"/>
-          <p:cNvSpPr/>
-          <p:nvPr/>
-        </p:nvSpPr>
-        <p:spPr>
-          <a:xfrm>
-            <a:off x="7356624" y="246888"/>
-            <a:ext cx="1101575" cy="237744"/>
-          </a:xfrm>
-          <a:prstGeom prst="roundRect">
-            <a:avLst>
-              <a:gd name="adj" fmla="val 50000"/>
-            </a:avLst>
-          </a:prstGeom>
-          <a:solidFill>
-            <a:srgbClr val="34322F"/>
-          </a:solidFill>
-          <a:ln>
-            <a:noFill/>
-          </a:ln>
-          <a:effectLst/>
-        </p:spPr>
-        <p:style>
-          <a:lnRef idx="1">
-            <a:schemeClr val="accent1"/>
-          </a:lnRef>
-          <a:fillRef idx="3">
-            <a:schemeClr val="accent1"/>
-          </a:fillRef>
-          <a:effectRef idx="0">
-            <a:schemeClr val="accent1"/>
-          </a:effectRef>
-          <a:fontRef idx="minor">
-            <a:schemeClr val="lt1"/>
-          </a:fontRef>
-        </p:style>
-        <p:txBody>
-          <a:bodyPr rtlCol="0" anchor="ctr" wrap="none" lIns="0" rIns="0" tIns="0" bIns="0"/>
-          <a:lstStyle/>
-          <a:p>
-            <a:pPr algn="ctr"/>
-            <a:r>
-              <a:rPr sz="950" b="1" spc="90">
-                <a:solidFill>
-                  <a:srgbClr val="FFFDF7"/>
-                </a:solidFill>
-                <a:latin typeface="Karla"/>
-              </a:rPr>
-              <a:t>TOGETHER</a:t>
             </a:r>
           </a:p>
         </p:txBody>
@@ -18067,11 +17572,11 @@
               </a:spcAft>
             </a:pPr>
             <a:r>
-              <a:rPr sz="2800" b="1" i="0">
+              <a:rPr sz="2800" b="0" i="0">
                 <a:solidFill>
                   <a:srgbClr val="262422"/>
                 </a:solidFill>
-                <a:latin typeface="Libre Caslon Display"/>
+                <a:latin typeface="Georgia"/>
               </a:rPr>
               <a:t>Now the other four</a:t>
             </a:r>
@@ -18114,7 +17619,7 @@
                 <a:solidFill>
                   <a:srgbClr val="56524B"/>
                 </a:solidFill>
-                <a:latin typeface="Karla"/>
+                <a:latin typeface="Calibri"/>
               </a:rPr>
               <a:t>Can the front page answer them? Talk it through in your group.</a:t>
             </a:r>
@@ -18310,11 +17815,11 @@
               </a:spcAft>
             </a:pPr>
             <a:r>
-              <a:rPr sz="1300" b="1" i="0">
+              <a:rPr sz="1300" b="0" i="0">
                 <a:solidFill>
                   <a:srgbClr val="262422"/>
                 </a:solidFill>
-                <a:latin typeface="Libre Caslon Display"/>
+                <a:latin typeface="Georgia"/>
               </a:rPr>
               <a:t>Who gains if I believe it?</a:t>
             </a:r>
@@ -18510,11 +18015,11 @@
               </a:spcAft>
             </a:pPr>
             <a:r>
-              <a:rPr sz="1300" b="1" i="0">
+              <a:rPr sz="1300" b="0" i="0">
                 <a:solidFill>
                   <a:srgbClr val="262422"/>
                 </a:solidFill>
-                <a:latin typeface="Libre Caslon Display"/>
+                <a:latin typeface="Georgia"/>
               </a:rPr>
               <a:t>Who paid for it?</a:t>
             </a:r>
@@ -18710,11 +18215,11 @@
               </a:spcAft>
             </a:pPr>
             <a:r>
-              <a:rPr sz="1300" b="1" i="0">
+              <a:rPr sz="1300" b="0" i="0">
                 <a:solidFill>
                   <a:srgbClr val="262422"/>
                 </a:solidFill>
-                <a:latin typeface="Libre Caslon Display"/>
+                <a:latin typeface="Georgia"/>
               </a:rPr>
               <a:t>What is the evidence?</a:t>
             </a:r>
@@ -18910,11 +18415,11 @@
               </a:spcAft>
             </a:pPr>
             <a:r>
-              <a:rPr sz="1300" b="1" i="0">
+              <a:rPr sz="1300" b="0" i="0">
                 <a:solidFill>
                   <a:srgbClr val="262422"/>
                 </a:solidFill>
-                <a:latin typeface="Libre Caslon Display"/>
+                <a:latin typeface="Georgia"/>
               </a:rPr>
               <a:t>Has it been tested, and by whom?</a:t>
             </a:r>
@@ -18957,7 +18462,7 @@
                 <a:solidFill>
                   <a:srgbClr val="34322F"/>
                 </a:solidFill>
-                <a:latin typeface="Karla"/>
+                <a:latin typeface="Calibri"/>
               </a:rPr>
               <a:t>Then fill in the top of your evidence sheet: where you stand, and what you would need to know.</a:t>
             </a:r>
@@ -19025,7 +18530,7 @@
                 <a:solidFill>
                   <a:srgbClr val="8C877D"/>
                 </a:solidFill>
-                <a:latin typeface="Karla"/>
+                <a:latin typeface="Calibri"/>
               </a:rPr>
               <a:t>The Pastoral Guide</a:t>
             </a:r>
@@ -19068,7 +18573,7 @@
                 <a:solidFill>
                   <a:srgbClr val="8C877D"/>
                 </a:solidFill>
-                <a:latin typeface="Karla"/>
+                <a:latin typeface="Calibri"/>
               </a:rPr>
               <a:t>7 / 19</a:t>
             </a:r>
@@ -19173,7 +18678,7 @@
                 <a:solidFill>
                   <a:srgbClr val="34322F"/>
                 </a:solidFill>
-                <a:latin typeface="Karla"/>
+                <a:latin typeface="Calibri"/>
               </a:rPr>
               <a:t>QUESTION THE HEADLINE  ·  LESSON 2 OF 5</a:t>
             </a:r>
@@ -19228,7 +18733,7 @@
                 <a:solidFill>
                   <a:srgbClr val="FFFDF7"/>
                 </a:solidFill>
-                <a:latin typeface="Karla"/>
+                <a:latin typeface="Calibri"/>
               </a:rPr>
               <a:t>ROUND 1 OF 4</a:t>
             </a:r>
@@ -19315,7 +18820,7 @@
                 <a:solidFill>
                   <a:srgbClr val="FFFDF7"/>
                 </a:solidFill>
-                <a:latin typeface="Karla"/>
+                <a:latin typeface="Calibri"/>
               </a:rPr>
               <a:t>EVIDENCE A</a:t>
             </a:r>
@@ -19442,11 +18947,11 @@
               </a:spcAft>
             </a:pPr>
             <a:r>
-              <a:rPr sz="2200" b="1" i="0">
+              <a:rPr sz="2200" b="0" i="0">
                 <a:solidFill>
                   <a:srgbClr val="262422"/>
                 </a:solidFill>
-                <a:latin typeface="Libre Caslon Display"/>
+                <a:latin typeface="Georgia"/>
               </a:rPr>
               <a:t>The advert</a:t>
             </a:r>
@@ -19532,7 +19037,7 @@
                 <a:solidFill>
                   <a:srgbClr val="8C877D"/>
                 </a:solidFill>
-                <a:latin typeface="Karla"/>
+                <a:latin typeface="Calibri"/>
               </a:rPr>
               <a:t>Source: Quoted in Wikipedia, Thalidomide</a:t>
             </a:r>
@@ -19575,7 +19080,7 @@
                 <a:solidFill>
                   <a:srgbClr val="34322F"/>
                 </a:solidFill>
-                <a:latin typeface="Karla"/>
+                <a:latin typeface="Calibri"/>
               </a:rPr>
               <a:t>Read it as a group. Fill in the card A row on your evidence sheet, then move on the line.</a:t>
             </a:r>
@@ -19643,7 +19148,7 @@
                 <a:solidFill>
                   <a:srgbClr val="8C877D"/>
                 </a:solidFill>
-                <a:latin typeface="Karla"/>
+                <a:latin typeface="Calibri"/>
               </a:rPr>
               <a:t>The Pastoral Guide</a:t>
             </a:r>
@@ -19686,7 +19191,7 @@
                 <a:solidFill>
                   <a:srgbClr val="8C877D"/>
                 </a:solidFill>
-                <a:latin typeface="Karla"/>
+                <a:latin typeface="Calibri"/>
               </a:rPr>
               <a:t>8 / 19</a:t>
             </a:r>
@@ -19791,7 +19296,7 @@
                 <a:solidFill>
                   <a:srgbClr val="34322F"/>
                 </a:solidFill>
-                <a:latin typeface="Karla"/>
+                <a:latin typeface="Calibri"/>
               </a:rPr>
               <a:t>QUESTION THE HEADLINE  ·  LESSON 2 OF 5</a:t>
             </a:r>
@@ -19846,7 +19351,7 @@
                 <a:solidFill>
                   <a:srgbClr val="FFFDF7"/>
                 </a:solidFill>
-                <a:latin typeface="Karla"/>
+                <a:latin typeface="Calibri"/>
               </a:rPr>
               <a:t>ROUND 2 OF 4</a:t>
             </a:r>
@@ -19933,7 +19438,7 @@
                 <a:solidFill>
                   <a:srgbClr val="FFFDF7"/>
                 </a:solidFill>
-                <a:latin typeface="Karla"/>
+                <a:latin typeface="Calibri"/>
               </a:rPr>
               <a:t>EVIDENCE B</a:t>
             </a:r>
@@ -20060,11 +19565,11 @@
               </a:spcAft>
             </a:pPr>
             <a:r>
-              <a:rPr sz="2200" b="1" i="0">
+              <a:rPr sz="2200" b="0" i="0">
                 <a:solidFill>
                   <a:srgbClr val="262422"/>
                 </a:solidFill>
-                <a:latin typeface="Libre Caslon Display"/>
+                <a:latin typeface="Georgia"/>
               </a:rPr>
               <a:t>The testing</a:t>
             </a:r>
@@ -20150,7 +19655,7 @@
                 <a:solidFill>
                   <a:srgbClr val="8C877D"/>
                 </a:solidFill>
-                <a:latin typeface="Karla"/>
+                <a:latin typeface="Calibri"/>
               </a:rPr>
               <a:t>Source: Wikipedia, Thalidomide; Science Museum</a:t>
             </a:r>
@@ -20193,7 +19698,7 @@
                 <a:solidFill>
                   <a:srgbClr val="34322F"/>
                 </a:solidFill>
-                <a:latin typeface="Karla"/>
+                <a:latin typeface="Calibri"/>
               </a:rPr>
               <a:t>Read it as a group. Fill in the card B row on your evidence sheet, then move on the line.</a:t>
             </a:r>
@@ -20261,7 +19766,7 @@
                 <a:solidFill>
                   <a:srgbClr val="8C877D"/>
                 </a:solidFill>
-                <a:latin typeface="Karla"/>
+                <a:latin typeface="Calibri"/>
               </a:rPr>
               <a:t>The Pastoral Guide</a:t>
             </a:r>
@@ -20304,7 +19809,7 @@
                 <a:solidFill>
                   <a:srgbClr val="8C877D"/>
                 </a:solidFill>
-                <a:latin typeface="Karla"/>
+                <a:latin typeface="Calibri"/>
               </a:rPr>
               <a:t>9 / 19</a:t>
             </a:r>
